--- a/projects/spanisch/kl07/sequenz-06-ciudad/06d-ciudad-test/PPT-06d.pptx
+++ b/projects/spanisch/kl07/sequenz-06-ciudad/06d-ciudad-test/PPT-06d.pptx
@@ -8,6 +8,12 @@
     <p:sldId id="256" r:id="rId7"/>
     <p:sldId id="257" r:id="rId8"/>
     <p:sldId id="258" r:id="rId9"/>
+    <p:sldId id="259" r:id="rId10"/>
+    <p:sldId id="260" r:id="rId11"/>
+    <p:sldId id="261" r:id="rId12"/>
+    <p:sldId id="262" r:id="rId13"/>
+    <p:sldId id="263" r:id="rId14"/>
+    <p:sldId id="264" r:id="rId15"/>
   </p:sldIdLst>
   <p:sldSz cx="12191695" cy="6858000" type="screen4x3"/>
   <p:notesSz cx="6858000" cy="9144000"/>
@@ -3556,7 +3562,7 @@
               </a:defRPr>
             </a:pPr>
             <a:r>
-              <a:t>📋 Wiederholung</a:t>
+              <a:t>Sequenz 6: Rückblick</a:t>
             </a:r>
           </a:p>
         </p:txBody>
@@ -3570,7 +3576,7 @@
         <p:spPr>
           <a:xfrm>
             <a:off x="640080" y="1463040"/>
-            <a:ext cx="5029200" cy="457200"/>
+            <a:ext cx="10972800" cy="548640"/>
           </a:xfrm>
           <a:prstGeom prst="rect">
             <a:avLst/>
@@ -3584,15 +3590,15 @@
           <a:lstStyle/>
           <a:p>
             <a:pPr algn="l">
-              <a:defRPr sz="2000" b="1">
-                <a:solidFill>
-                  <a:srgbClr val="C41E3A"/>
-                </a:solidFill>
-                <a:latin typeface="Arial"/>
-              </a:defRPr>
-            </a:pPr>
-            <a:r>
-              <a:t>Vokabeln</a:t>
+              <a:defRPr sz="2000" b="0">
+                <a:solidFill>
+                  <a:srgbClr val="222222"/>
+                </a:solidFill>
+                <a:latin typeface="Arial"/>
+              </a:defRPr>
+            </a:pPr>
+            <a:r>
+              <a:t>Lektion 6a: Orte in der Stadt</a:t>
             </a:r>
           </a:p>
         </p:txBody>
@@ -3605,8 +3611,8 @@
         </p:nvSpPr>
         <p:spPr>
           <a:xfrm>
-            <a:off x="822960" y="2011680"/>
-            <a:ext cx="4846320" cy="457200"/>
+            <a:off x="640080" y="2194560"/>
+            <a:ext cx="10972800" cy="548640"/>
           </a:xfrm>
           <a:prstGeom prst="rect">
             <a:avLst/>
@@ -3620,7 +3626,7 @@
           <a:lstStyle/>
           <a:p>
             <a:pPr algn="l">
-              <a:defRPr sz="1800" b="0">
+              <a:defRPr sz="2000" b="0">
                 <a:solidFill>
                   <a:srgbClr val="222222"/>
                 </a:solidFill>
@@ -3628,7 +3634,7 @@
               </a:defRPr>
             </a:pPr>
             <a:r>
-              <a:t>•  Orte</a:t>
+              <a:t>Lektion 6b: ir und estar</a:t>
             </a:r>
           </a:p>
         </p:txBody>
@@ -3641,8 +3647,8 @@
         </p:nvSpPr>
         <p:spPr>
           <a:xfrm>
-            <a:off x="822960" y="2560320"/>
-            <a:ext cx="4846320" cy="457200"/>
+            <a:off x="640080" y="2926080"/>
+            <a:ext cx="10972800" cy="548640"/>
           </a:xfrm>
           <a:prstGeom prst="rect">
             <a:avLst/>
@@ -3656,7 +3662,7 @@
           <a:lstStyle/>
           <a:p>
             <a:pPr algn="l">
-              <a:defRPr sz="1800" b="0">
+              <a:defRPr sz="2000" b="0">
                 <a:solidFill>
                   <a:srgbClr val="222222"/>
                 </a:solidFill>
@@ -3664,115 +3670,7 @@
               </a:defRPr>
             </a:pPr>
             <a:r>
-              <a:t>•  Richtungen</a:t>
-            </a:r>
-          </a:p>
-        </p:txBody>
-      </p:sp>
-      <p:sp>
-        <p:nvSpPr>
-          <p:cNvPr id="11" name="TextBox 10"/>
-          <p:cNvSpPr txBox="1"/>
-          <p:nvPr/>
-        </p:nvSpPr>
-        <p:spPr>
-          <a:xfrm>
-            <a:off x="6400800" y="1463040"/>
-            <a:ext cx="5029200" cy="457200"/>
-          </a:xfrm>
-          <a:prstGeom prst="rect">
-            <a:avLst/>
-          </a:prstGeom>
-          <a:noFill/>
-        </p:spPr>
-        <p:txBody>
-          <a:bodyPr wrap="none">
-            <a:spAutoFit/>
-          </a:bodyPr>
-          <a:lstStyle/>
-          <a:p>
-            <a:pPr algn="l">
-              <a:defRPr sz="2000" b="1">
-                <a:solidFill>
-                  <a:srgbClr val="C41E3A"/>
-                </a:solidFill>
-                <a:latin typeface="Arial"/>
-              </a:defRPr>
-            </a:pPr>
-            <a:r>
-              <a:t>Grammatik</a:t>
-            </a:r>
-          </a:p>
-        </p:txBody>
-      </p:sp>
-      <p:sp>
-        <p:nvSpPr>
-          <p:cNvPr id="12" name="TextBox 11"/>
-          <p:cNvSpPr txBox="1"/>
-          <p:nvPr/>
-        </p:nvSpPr>
-        <p:spPr>
-          <a:xfrm>
-            <a:off x="6583680" y="2011680"/>
-            <a:ext cx="4846320" cy="457200"/>
-          </a:xfrm>
-          <a:prstGeom prst="rect">
-            <a:avLst/>
-          </a:prstGeom>
-          <a:noFill/>
-        </p:spPr>
-        <p:txBody>
-          <a:bodyPr wrap="none">
-            <a:spAutoFit/>
-          </a:bodyPr>
-          <a:lstStyle/>
-          <a:p>
-            <a:pPr algn="l">
-              <a:defRPr sz="1800" b="0">
-                <a:solidFill>
-                  <a:srgbClr val="222222"/>
-                </a:solidFill>
-                <a:latin typeface="Arial"/>
-              </a:defRPr>
-            </a:pPr>
-            <a:r>
-              <a:t>•  ir + a(l)</a:t>
-            </a:r>
-          </a:p>
-        </p:txBody>
-      </p:sp>
-      <p:sp>
-        <p:nvSpPr>
-          <p:cNvPr id="13" name="TextBox 12"/>
-          <p:cNvSpPr txBox="1"/>
-          <p:nvPr/>
-        </p:nvSpPr>
-        <p:spPr>
-          <a:xfrm>
-            <a:off x="6583680" y="2560320"/>
-            <a:ext cx="4846320" cy="457200"/>
-          </a:xfrm>
-          <a:prstGeom prst="rect">
-            <a:avLst/>
-          </a:prstGeom>
-          <a:noFill/>
-        </p:spPr>
-        <p:txBody>
-          <a:bodyPr wrap="none">
-            <a:spAutoFit/>
-          </a:bodyPr>
-          <a:lstStyle/>
-          <a:p>
-            <a:pPr algn="l">
-              <a:defRPr sz="1800" b="0">
-                <a:solidFill>
-                  <a:srgbClr val="222222"/>
-                </a:solidFill>
-                <a:latin typeface="Arial"/>
-              </a:defRPr>
-            </a:pPr>
-            <a:r>
-              <a:t>•  estar + en</a:t>
+              <a:t>Lektion 6c: Wegbeschreibungen</a:t>
             </a:r>
           </a:p>
         </p:txBody>
@@ -3991,14 +3889,356 @@
       </p:sp>
       <p:sp>
         <p:nvSpPr>
-          <p:cNvPr id="7" name="Rectangle 6"/>
+          <p:cNvPr id="7" name="TextBox 6"/>
+          <p:cNvSpPr txBox="1"/>
+          <p:nvPr/>
+        </p:nvSpPr>
+        <p:spPr>
+          <a:xfrm>
+            <a:off x="457200" y="640080"/>
+            <a:ext cx="11274552" cy="731520"/>
+          </a:xfrm>
+          <a:prstGeom prst="rect">
+            <a:avLst/>
+          </a:prstGeom>
+          <a:noFill/>
+        </p:spPr>
+        <p:txBody>
+          <a:bodyPr wrap="none">
+            <a:spAutoFit/>
+          </a:bodyPr>
+          <a:lstStyle/>
+          <a:p>
+            <a:pPr algn="l">
+              <a:defRPr sz="3200" b="1">
+                <a:solidFill>
+                  <a:srgbClr val="C41E3A"/>
+                </a:solidFill>
+                <a:latin typeface="Arial"/>
+              </a:defRPr>
+            </a:pPr>
+            <a:r>
+              <a:t>📋 Vokabeln Seq. 6</a:t>
+            </a:r>
+          </a:p>
+        </p:txBody>
+      </p:sp>
+      <p:sp>
+        <p:nvSpPr>
+          <p:cNvPr id="8" name="TextBox 7"/>
+          <p:cNvSpPr txBox="1"/>
+          <p:nvPr/>
+        </p:nvSpPr>
+        <p:spPr>
+          <a:xfrm>
+            <a:off x="640080" y="1463040"/>
+            <a:ext cx="5029200" cy="457200"/>
+          </a:xfrm>
+          <a:prstGeom prst="rect">
+            <a:avLst/>
+          </a:prstGeom>
+          <a:noFill/>
+        </p:spPr>
+        <p:txBody>
+          <a:bodyPr wrap="none">
+            <a:spAutoFit/>
+          </a:bodyPr>
+          <a:lstStyle/>
+          <a:p>
+            <a:pPr algn="l">
+              <a:defRPr sz="2000" b="1">
+                <a:solidFill>
+                  <a:srgbClr val="C41E3A"/>
+                </a:solidFill>
+                <a:latin typeface="Arial"/>
+              </a:defRPr>
+            </a:pPr>
+            <a:r>
+              <a:t>Vokabeln</a:t>
+            </a:r>
+          </a:p>
+        </p:txBody>
+      </p:sp>
+      <p:sp>
+        <p:nvSpPr>
+          <p:cNvPr id="9" name="TextBox 8"/>
+          <p:cNvSpPr txBox="1"/>
+          <p:nvPr/>
+        </p:nvSpPr>
+        <p:spPr>
+          <a:xfrm>
+            <a:off x="822960" y="2011680"/>
+            <a:ext cx="4846320" cy="457200"/>
+          </a:xfrm>
+          <a:prstGeom prst="rect">
+            <a:avLst/>
+          </a:prstGeom>
+          <a:noFill/>
+        </p:spPr>
+        <p:txBody>
+          <a:bodyPr wrap="none">
+            <a:spAutoFit/>
+          </a:bodyPr>
+          <a:lstStyle/>
+          <a:p>
+            <a:pPr algn="l">
+              <a:defRPr sz="1800" b="0">
+                <a:solidFill>
+                  <a:srgbClr val="222222"/>
+                </a:solidFill>
+                <a:latin typeface="Arial"/>
+              </a:defRPr>
+            </a:pPr>
+            <a:r>
+              <a:t>•  centro, cine, museo</a:t>
+            </a:r>
+          </a:p>
+        </p:txBody>
+      </p:sp>
+      <p:sp>
+        <p:nvSpPr>
+          <p:cNvPr id="10" name="TextBox 9"/>
+          <p:cNvSpPr txBox="1"/>
+          <p:nvPr/>
+        </p:nvSpPr>
+        <p:spPr>
+          <a:xfrm>
+            <a:off x="822960" y="2560320"/>
+            <a:ext cx="4846320" cy="457200"/>
+          </a:xfrm>
+          <a:prstGeom prst="rect">
+            <a:avLst/>
+          </a:prstGeom>
+          <a:noFill/>
+        </p:spPr>
+        <p:txBody>
+          <a:bodyPr wrap="none">
+            <a:spAutoFit/>
+          </a:bodyPr>
+          <a:lstStyle/>
+          <a:p>
+            <a:pPr algn="l">
+              <a:defRPr sz="1800" b="0">
+                <a:solidFill>
+                  <a:srgbClr val="222222"/>
+                </a:solidFill>
+                <a:latin typeface="Arial"/>
+              </a:defRPr>
+            </a:pPr>
+            <a:r>
+              <a:t>•  supermercado, biblioteca</a:t>
+            </a:r>
+          </a:p>
+        </p:txBody>
+      </p:sp>
+      <p:sp>
+        <p:nvSpPr>
+          <p:cNvPr id="11" name="TextBox 10"/>
+          <p:cNvSpPr txBox="1"/>
+          <p:nvPr/>
+        </p:nvSpPr>
+        <p:spPr>
+          <a:xfrm>
+            <a:off x="822960" y="3108960"/>
+            <a:ext cx="4846320" cy="457200"/>
+          </a:xfrm>
+          <a:prstGeom prst="rect">
+            <a:avLst/>
+          </a:prstGeom>
+          <a:noFill/>
+        </p:spPr>
+        <p:txBody>
+          <a:bodyPr wrap="none">
+            <a:spAutoFit/>
+          </a:bodyPr>
+          <a:lstStyle/>
+          <a:p>
+            <a:pPr algn="l">
+              <a:defRPr sz="1800" b="0">
+                <a:solidFill>
+                  <a:srgbClr val="222222"/>
+                </a:solidFill>
+                <a:latin typeface="Arial"/>
+              </a:defRPr>
+            </a:pPr>
+            <a:r>
+              <a:t>•  estación, hospital</a:t>
+            </a:r>
+          </a:p>
+        </p:txBody>
+      </p:sp>
+      <p:sp>
+        <p:nvSpPr>
+          <p:cNvPr id="12" name="TextBox 11"/>
+          <p:cNvSpPr txBox="1"/>
+          <p:nvPr/>
+        </p:nvSpPr>
+        <p:spPr>
+          <a:xfrm>
+            <a:off x="6400800" y="1463040"/>
+            <a:ext cx="5029200" cy="457200"/>
+          </a:xfrm>
+          <a:prstGeom prst="rect">
+            <a:avLst/>
+          </a:prstGeom>
+          <a:noFill/>
+        </p:spPr>
+        <p:txBody>
+          <a:bodyPr wrap="none">
+            <a:spAutoFit/>
+          </a:bodyPr>
+          <a:lstStyle/>
+          <a:p>
+            <a:pPr algn="l">
+              <a:defRPr sz="2000" b="1">
+                <a:solidFill>
+                  <a:srgbClr val="C41E3A"/>
+                </a:solidFill>
+                <a:latin typeface="Arial"/>
+              </a:defRPr>
+            </a:pPr>
+            <a:r>
+              <a:t>Grammatik</a:t>
+            </a:r>
+          </a:p>
+        </p:txBody>
+      </p:sp>
+      <p:sp>
+        <p:nvSpPr>
+          <p:cNvPr id="13" name="TextBox 12"/>
+          <p:cNvSpPr txBox="1"/>
+          <p:nvPr/>
+        </p:nvSpPr>
+        <p:spPr>
+          <a:xfrm>
+            <a:off x="6583680" y="2011680"/>
+            <a:ext cx="4846320" cy="457200"/>
+          </a:xfrm>
+          <a:prstGeom prst="rect">
+            <a:avLst/>
+          </a:prstGeom>
+          <a:noFill/>
+        </p:spPr>
+        <p:txBody>
+          <a:bodyPr wrap="none">
+            <a:spAutoFit/>
+          </a:bodyPr>
+          <a:lstStyle/>
+          <a:p>
+            <a:pPr algn="l">
+              <a:defRPr sz="1800" b="0">
+                <a:solidFill>
+                  <a:srgbClr val="222222"/>
+                </a:solidFill>
+                <a:latin typeface="Arial"/>
+              </a:defRPr>
+            </a:pPr>
+            <a:r>
+              <a:t>•  a la derecha/izquierda</a:t>
+            </a:r>
+          </a:p>
+        </p:txBody>
+      </p:sp>
+      <p:sp>
+        <p:nvSpPr>
+          <p:cNvPr id="14" name="TextBox 13"/>
+          <p:cNvSpPr txBox="1"/>
+          <p:nvPr/>
+        </p:nvSpPr>
+        <p:spPr>
+          <a:xfrm>
+            <a:off x="6583680" y="2560320"/>
+            <a:ext cx="4846320" cy="457200"/>
+          </a:xfrm>
+          <a:prstGeom prst="rect">
+            <a:avLst/>
+          </a:prstGeom>
+          <a:noFill/>
+        </p:spPr>
+        <p:txBody>
+          <a:bodyPr wrap="none">
+            <a:spAutoFit/>
+          </a:bodyPr>
+          <a:lstStyle/>
+          <a:p>
+            <a:pPr algn="l">
+              <a:defRPr sz="1800" b="0">
+                <a:solidFill>
+                  <a:srgbClr val="222222"/>
+                </a:solidFill>
+                <a:latin typeface="Arial"/>
+              </a:defRPr>
+            </a:pPr>
+            <a:r>
+              <a:t>•  todo recto, al final</a:t>
+            </a:r>
+          </a:p>
+        </p:txBody>
+      </p:sp>
+      <p:sp>
+        <p:nvSpPr>
+          <p:cNvPr id="15" name="TextBox 14"/>
+          <p:cNvSpPr txBox="1"/>
+          <p:nvPr/>
+        </p:nvSpPr>
+        <p:spPr>
+          <a:xfrm>
+            <a:off x="6583680" y="3108960"/>
+            <a:ext cx="4846320" cy="457200"/>
+          </a:xfrm>
+          <a:prstGeom prst="rect">
+            <a:avLst/>
+          </a:prstGeom>
+          <a:noFill/>
+        </p:spPr>
+        <p:txBody>
+          <a:bodyPr wrap="none">
+            <a:spAutoFit/>
+          </a:bodyPr>
+          <a:lstStyle/>
+          <a:p>
+            <a:pPr algn="l">
+              <a:defRPr sz="1800" b="0">
+                <a:solidFill>
+                  <a:srgbClr val="222222"/>
+                </a:solidFill>
+                <a:latin typeface="Arial"/>
+              </a:defRPr>
+            </a:pPr>
+            <a:r>
+              <a:t>•  delante de, detrás de</a:t>
+            </a:r>
+          </a:p>
+        </p:txBody>
+      </p:sp>
+    </p:spTree>
+  </p:cSld>
+  <p:clrMapOvr>
+    <a:masterClrMapping/>
+  </p:clrMapOvr>
+</p:sld>
+</file>
+
+<file path=ppt/slides/slide4.xml><?xml version="1.0" encoding="utf-8"?>
+<p:sld xmlns:a="http://schemas.openxmlformats.org/drawingml/2006/main" xmlns:p="http://schemas.openxmlformats.org/presentationml/2006/main" xmlns:r="http://schemas.openxmlformats.org/officeDocument/2006/relationships">
+  <p:cSld>
+    <p:spTree>
+      <p:nvGrpSpPr>
+        <p:cNvPr id="1" name=""/>
+        <p:cNvGrpSpPr/>
+        <p:nvPr/>
+      </p:nvGrpSpPr>
+      <p:grpSpPr/>
+      <p:sp>
+        <p:nvSpPr>
+          <p:cNvPr id="2" name="Rectangle 1"/>
           <p:cNvSpPr/>
           <p:nvPr/>
         </p:nvSpPr>
         <p:spPr>
           <a:xfrm>
-            <a:off x="457200" y="640080"/>
-            <a:ext cx="1828800" cy="457200"/>
+            <a:off x="0" y="0"/>
+            <a:ext cx="12191695" cy="457200"/>
           </a:xfrm>
           <a:prstGeom prst="rect">
             <a:avLst/>
@@ -4034,6 +4274,1089 @@
       </p:sp>
       <p:sp>
         <p:nvSpPr>
+          <p:cNvPr id="3" name="TextBox 2"/>
+          <p:cNvSpPr txBox="1"/>
+          <p:nvPr/>
+        </p:nvSpPr>
+        <p:spPr>
+          <a:xfrm>
+            <a:off x="274320" y="91440"/>
+            <a:ext cx="3657600" cy="274320"/>
+          </a:xfrm>
+          <a:prstGeom prst="rect">
+            <a:avLst/>
+          </a:prstGeom>
+          <a:noFill/>
+        </p:spPr>
+        <p:txBody>
+          <a:bodyPr wrap="none">
+            <a:spAutoFit/>
+          </a:bodyPr>
+          <a:lstStyle/>
+          <a:p>
+            <a:pPr algn="l">
+              <a:defRPr sz="1400" b="1">
+                <a:solidFill>
+                  <a:srgbClr val="FFFFFF"/>
+                </a:solidFill>
+                <a:latin typeface="Arial"/>
+              </a:defRPr>
+            </a:pPr>
+            <a:r>
+              <a:t>Spanisch Klasse 7 · LP-06d</a:t>
+            </a:r>
+          </a:p>
+        </p:txBody>
+      </p:sp>
+      <p:sp>
+        <p:nvSpPr>
+          <p:cNvPr id="4" name="Rectangle 3"/>
+          <p:cNvSpPr/>
+          <p:nvPr/>
+        </p:nvSpPr>
+        <p:spPr>
+          <a:xfrm>
+            <a:off x="0" y="6583680"/>
+            <a:ext cx="12191695" cy="274320"/>
+          </a:xfrm>
+          <a:prstGeom prst="rect">
+            <a:avLst/>
+          </a:prstGeom>
+          <a:solidFill>
+            <a:srgbClr val="F5F5F5"/>
+          </a:solidFill>
+          <a:ln>
+            <a:noFill/>
+          </a:ln>
+        </p:spPr>
+        <p:style>
+          <a:lnRef idx="1">
+            <a:schemeClr val="accent1"/>
+          </a:lnRef>
+          <a:fillRef idx="3">
+            <a:schemeClr val="accent1"/>
+          </a:fillRef>
+          <a:effectRef idx="2">
+            <a:schemeClr val="accent1"/>
+          </a:effectRef>
+          <a:fontRef idx="minor">
+            <a:schemeClr val="lt1"/>
+          </a:fontRef>
+        </p:style>
+        <p:txBody>
+          <a:bodyPr rtlCol="0" anchor="ctr"/>
+          <a:lstStyle/>
+          <a:p>
+            <a:pPr algn="ctr"/>
+          </a:p>
+        </p:txBody>
+      </p:sp>
+      <p:sp>
+        <p:nvSpPr>
+          <p:cNvPr id="5" name="TextBox 4"/>
+          <p:cNvSpPr txBox="1"/>
+          <p:nvPr/>
+        </p:nvSpPr>
+        <p:spPr>
+          <a:xfrm>
+            <a:off x="274320" y="6601968"/>
+            <a:ext cx="4572000" cy="228600"/>
+          </a:xfrm>
+          <a:prstGeom prst="rect">
+            <a:avLst/>
+          </a:prstGeom>
+          <a:noFill/>
+        </p:spPr>
+        <p:txBody>
+          <a:bodyPr wrap="none">
+            <a:spAutoFit/>
+          </a:bodyPr>
+          <a:lstStyle/>
+          <a:p>
+            <a:pPr algn="l">
+              <a:defRPr sz="1000" b="0">
+                <a:solidFill>
+                  <a:srgbClr val="555555"/>
+                </a:solidFill>
+                <a:latin typeface="Arial"/>
+              </a:defRPr>
+            </a:pPr>
+            <a:r>
+              <a:t>Test: La ciudad</a:t>
+            </a:r>
+          </a:p>
+        </p:txBody>
+      </p:sp>
+      <p:sp>
+        <p:nvSpPr>
+          <p:cNvPr id="6" name="TextBox 5"/>
+          <p:cNvSpPr txBox="1"/>
+          <p:nvPr/>
+        </p:nvSpPr>
+        <p:spPr>
+          <a:xfrm>
+            <a:off x="9144000" y="6601968"/>
+            <a:ext cx="2743200" cy="228600"/>
+          </a:xfrm>
+          <a:prstGeom prst="rect">
+            <a:avLst/>
+          </a:prstGeom>
+          <a:noFill/>
+        </p:spPr>
+        <p:txBody>
+          <a:bodyPr wrap="none">
+            <a:spAutoFit/>
+          </a:bodyPr>
+          <a:lstStyle/>
+          <a:p>
+            <a:pPr algn="r">
+              <a:defRPr sz="1000" b="0">
+                <a:solidFill>
+                  <a:srgbClr val="555555"/>
+                </a:solidFill>
+                <a:latin typeface="Arial"/>
+              </a:defRPr>
+            </a:pPr>
+            <a:r>
+              <a:t>Sequenz 6</a:t>
+            </a:r>
+          </a:p>
+        </p:txBody>
+      </p:sp>
+      <p:sp>
+        <p:nvSpPr>
+          <p:cNvPr id="7" name="TextBox 6"/>
+          <p:cNvSpPr txBox="1"/>
+          <p:nvPr/>
+        </p:nvSpPr>
+        <p:spPr>
+          <a:xfrm>
+            <a:off x="457200" y="640080"/>
+            <a:ext cx="11274552" cy="731520"/>
+          </a:xfrm>
+          <a:prstGeom prst="rect">
+            <a:avLst/>
+          </a:prstGeom>
+          <a:noFill/>
+        </p:spPr>
+        <p:txBody>
+          <a:bodyPr wrap="none">
+            <a:spAutoFit/>
+          </a:bodyPr>
+          <a:lstStyle/>
+          <a:p>
+            <a:pPr algn="l">
+              <a:defRPr sz="3200" b="1">
+                <a:solidFill>
+                  <a:srgbClr val="C41E3A"/>
+                </a:solidFill>
+                <a:latin typeface="Arial"/>
+              </a:defRPr>
+            </a:pPr>
+            <a:r>
+              <a:t>📝 Grammatik: ir vs. estar</a:t>
+            </a:r>
+          </a:p>
+        </p:txBody>
+      </p:sp>
+      <p:sp>
+        <p:nvSpPr>
+          <p:cNvPr id="8" name="TextBox 7"/>
+          <p:cNvSpPr txBox="1"/>
+          <p:nvPr/>
+        </p:nvSpPr>
+        <p:spPr>
+          <a:xfrm>
+            <a:off x="640080" y="1463040"/>
+            <a:ext cx="5029200" cy="731520"/>
+          </a:xfrm>
+          <a:prstGeom prst="rect">
+            <a:avLst/>
+          </a:prstGeom>
+          <a:noFill/>
+        </p:spPr>
+        <p:txBody>
+          <a:bodyPr wrap="none">
+            <a:spAutoFit/>
+          </a:bodyPr>
+          <a:lstStyle/>
+          <a:p>
+            <a:pPr algn="l">
+              <a:defRPr sz="2800" b="1">
+                <a:solidFill>
+                  <a:srgbClr val="C41E3A"/>
+                </a:solidFill>
+                <a:latin typeface="Arial"/>
+              </a:defRPr>
+            </a:pPr>
+            <a:r>
+              <a:t>ir a + Ort</a:t>
+            </a:r>
+          </a:p>
+        </p:txBody>
+      </p:sp>
+      <p:sp>
+        <p:nvSpPr>
+          <p:cNvPr id="9" name="TextBox 8"/>
+          <p:cNvSpPr txBox="1"/>
+          <p:nvPr/>
+        </p:nvSpPr>
+        <p:spPr>
+          <a:xfrm>
+            <a:off x="5943600" y="1554480"/>
+            <a:ext cx="5486400" cy="548640"/>
+          </a:xfrm>
+          <a:prstGeom prst="rect">
+            <a:avLst/>
+          </a:prstGeom>
+          <a:noFill/>
+        </p:spPr>
+        <p:txBody>
+          <a:bodyPr wrap="none">
+            <a:spAutoFit/>
+          </a:bodyPr>
+          <a:lstStyle/>
+          <a:p>
+            <a:pPr algn="l">
+              <a:defRPr sz="1800" b="0">
+                <a:solidFill>
+                  <a:srgbClr val="555555"/>
+                </a:solidFill>
+                <a:latin typeface="Arial"/>
+              </a:defRPr>
+            </a:pPr>
+            <a:r>
+              <a:t>Bewegung (wohin?)</a:t>
+            </a:r>
+          </a:p>
+        </p:txBody>
+      </p:sp>
+      <p:sp>
+        <p:nvSpPr>
+          <p:cNvPr id="10" name="TextBox 9"/>
+          <p:cNvSpPr txBox="1"/>
+          <p:nvPr/>
+        </p:nvSpPr>
+        <p:spPr>
+          <a:xfrm>
+            <a:off x="640080" y="2560320"/>
+            <a:ext cx="5029200" cy="731520"/>
+          </a:xfrm>
+          <a:prstGeom prst="rect">
+            <a:avLst/>
+          </a:prstGeom>
+          <a:noFill/>
+        </p:spPr>
+        <p:txBody>
+          <a:bodyPr wrap="none">
+            <a:spAutoFit/>
+          </a:bodyPr>
+          <a:lstStyle/>
+          <a:p>
+            <a:pPr algn="l">
+              <a:defRPr sz="2800" b="1">
+                <a:solidFill>
+                  <a:srgbClr val="C41E3A"/>
+                </a:solidFill>
+                <a:latin typeface="Arial"/>
+              </a:defRPr>
+            </a:pPr>
+            <a:r>
+              <a:t>estar en + Ort</a:t>
+            </a:r>
+          </a:p>
+        </p:txBody>
+      </p:sp>
+      <p:sp>
+        <p:nvSpPr>
+          <p:cNvPr id="11" name="TextBox 10"/>
+          <p:cNvSpPr txBox="1"/>
+          <p:nvPr/>
+        </p:nvSpPr>
+        <p:spPr>
+          <a:xfrm>
+            <a:off x="5943600" y="2651760"/>
+            <a:ext cx="5486400" cy="548640"/>
+          </a:xfrm>
+          <a:prstGeom prst="rect">
+            <a:avLst/>
+          </a:prstGeom>
+          <a:noFill/>
+        </p:spPr>
+        <p:txBody>
+          <a:bodyPr wrap="none">
+            <a:spAutoFit/>
+          </a:bodyPr>
+          <a:lstStyle/>
+          <a:p>
+            <a:pPr algn="l">
+              <a:defRPr sz="1800" b="0">
+                <a:solidFill>
+                  <a:srgbClr val="555555"/>
+                </a:solidFill>
+                <a:latin typeface="Arial"/>
+              </a:defRPr>
+            </a:pPr>
+            <a:r>
+              <a:t>Position (wo?)</a:t>
+            </a:r>
+          </a:p>
+        </p:txBody>
+      </p:sp>
+      <p:sp>
+        <p:nvSpPr>
+          <p:cNvPr id="12" name="TextBox 11"/>
+          <p:cNvSpPr txBox="1"/>
+          <p:nvPr/>
+        </p:nvSpPr>
+        <p:spPr>
+          <a:xfrm>
+            <a:off x="640080" y="3657600"/>
+            <a:ext cx="5029200" cy="731520"/>
+          </a:xfrm>
+          <a:prstGeom prst="rect">
+            <a:avLst/>
+          </a:prstGeom>
+          <a:noFill/>
+        </p:spPr>
+        <p:txBody>
+          <a:bodyPr wrap="none">
+            <a:spAutoFit/>
+          </a:bodyPr>
+          <a:lstStyle/>
+          <a:p>
+            <a:pPr algn="l">
+              <a:defRPr sz="2800" b="1">
+                <a:solidFill>
+                  <a:srgbClr val="C41E3A"/>
+                </a:solidFill>
+                <a:latin typeface="Arial"/>
+              </a:defRPr>
+            </a:pPr>
+            <a:r>
+              <a:t>a + el = al</a:t>
+            </a:r>
+          </a:p>
+        </p:txBody>
+      </p:sp>
+      <p:sp>
+        <p:nvSpPr>
+          <p:cNvPr id="13" name="TextBox 12"/>
+          <p:cNvSpPr txBox="1"/>
+          <p:nvPr/>
+        </p:nvSpPr>
+        <p:spPr>
+          <a:xfrm>
+            <a:off x="5943600" y="3749039"/>
+            <a:ext cx="5486400" cy="548640"/>
+          </a:xfrm>
+          <a:prstGeom prst="rect">
+            <a:avLst/>
+          </a:prstGeom>
+          <a:noFill/>
+        </p:spPr>
+        <p:txBody>
+          <a:bodyPr wrap="none">
+            <a:spAutoFit/>
+          </a:bodyPr>
+          <a:lstStyle/>
+          <a:p>
+            <a:pPr algn="l">
+              <a:defRPr sz="1800" b="0">
+                <a:solidFill>
+                  <a:srgbClr val="555555"/>
+                </a:solidFill>
+                <a:latin typeface="Arial"/>
+              </a:defRPr>
+            </a:pPr>
+          </a:p>
+        </p:txBody>
+      </p:sp>
+    </p:spTree>
+  </p:cSld>
+  <p:clrMapOvr>
+    <a:masterClrMapping/>
+  </p:clrMapOvr>
+</p:sld>
+</file>
+
+<file path=ppt/slides/slide5.xml><?xml version="1.0" encoding="utf-8"?>
+<p:sld xmlns:a="http://schemas.openxmlformats.org/drawingml/2006/main" xmlns:p="http://schemas.openxmlformats.org/presentationml/2006/main" xmlns:r="http://schemas.openxmlformats.org/officeDocument/2006/relationships">
+  <p:cSld>
+    <p:spTree>
+      <p:nvGrpSpPr>
+        <p:cNvPr id="1" name=""/>
+        <p:cNvGrpSpPr/>
+        <p:nvPr/>
+      </p:nvGrpSpPr>
+      <p:grpSpPr/>
+      <p:sp>
+        <p:nvSpPr>
+          <p:cNvPr id="2" name="Rectangle 1"/>
+          <p:cNvSpPr/>
+          <p:nvPr/>
+        </p:nvSpPr>
+        <p:spPr>
+          <a:xfrm>
+            <a:off x="0" y="0"/>
+            <a:ext cx="12191695" cy="457200"/>
+          </a:xfrm>
+          <a:prstGeom prst="rect">
+            <a:avLst/>
+          </a:prstGeom>
+          <a:solidFill>
+            <a:srgbClr val="C41E3A"/>
+          </a:solidFill>
+          <a:ln>
+            <a:noFill/>
+          </a:ln>
+        </p:spPr>
+        <p:style>
+          <a:lnRef idx="1">
+            <a:schemeClr val="accent1"/>
+          </a:lnRef>
+          <a:fillRef idx="3">
+            <a:schemeClr val="accent1"/>
+          </a:fillRef>
+          <a:effectRef idx="2">
+            <a:schemeClr val="accent1"/>
+          </a:effectRef>
+          <a:fontRef idx="minor">
+            <a:schemeClr val="lt1"/>
+          </a:fontRef>
+        </p:style>
+        <p:txBody>
+          <a:bodyPr rtlCol="0" anchor="ctr"/>
+          <a:lstStyle/>
+          <a:p>
+            <a:pPr algn="ctr"/>
+          </a:p>
+        </p:txBody>
+      </p:sp>
+      <p:sp>
+        <p:nvSpPr>
+          <p:cNvPr id="3" name="TextBox 2"/>
+          <p:cNvSpPr txBox="1"/>
+          <p:nvPr/>
+        </p:nvSpPr>
+        <p:spPr>
+          <a:xfrm>
+            <a:off x="274320" y="91440"/>
+            <a:ext cx="3657600" cy="274320"/>
+          </a:xfrm>
+          <a:prstGeom prst="rect">
+            <a:avLst/>
+          </a:prstGeom>
+          <a:noFill/>
+        </p:spPr>
+        <p:txBody>
+          <a:bodyPr wrap="none">
+            <a:spAutoFit/>
+          </a:bodyPr>
+          <a:lstStyle/>
+          <a:p>
+            <a:pPr algn="l">
+              <a:defRPr sz="1400" b="1">
+                <a:solidFill>
+                  <a:srgbClr val="FFFFFF"/>
+                </a:solidFill>
+                <a:latin typeface="Arial"/>
+              </a:defRPr>
+            </a:pPr>
+            <a:r>
+              <a:t>Spanisch Klasse 7 · LP-06d</a:t>
+            </a:r>
+          </a:p>
+        </p:txBody>
+      </p:sp>
+      <p:sp>
+        <p:nvSpPr>
+          <p:cNvPr id="4" name="Rectangle 3"/>
+          <p:cNvSpPr/>
+          <p:nvPr/>
+        </p:nvSpPr>
+        <p:spPr>
+          <a:xfrm>
+            <a:off x="0" y="6583680"/>
+            <a:ext cx="12191695" cy="274320"/>
+          </a:xfrm>
+          <a:prstGeom prst="rect">
+            <a:avLst/>
+          </a:prstGeom>
+          <a:solidFill>
+            <a:srgbClr val="F5F5F5"/>
+          </a:solidFill>
+          <a:ln>
+            <a:noFill/>
+          </a:ln>
+        </p:spPr>
+        <p:style>
+          <a:lnRef idx="1">
+            <a:schemeClr val="accent1"/>
+          </a:lnRef>
+          <a:fillRef idx="3">
+            <a:schemeClr val="accent1"/>
+          </a:fillRef>
+          <a:effectRef idx="2">
+            <a:schemeClr val="accent1"/>
+          </a:effectRef>
+          <a:fontRef idx="minor">
+            <a:schemeClr val="lt1"/>
+          </a:fontRef>
+        </p:style>
+        <p:txBody>
+          <a:bodyPr rtlCol="0" anchor="ctr"/>
+          <a:lstStyle/>
+          <a:p>
+            <a:pPr algn="ctr"/>
+          </a:p>
+        </p:txBody>
+      </p:sp>
+      <p:sp>
+        <p:nvSpPr>
+          <p:cNvPr id="5" name="TextBox 4"/>
+          <p:cNvSpPr txBox="1"/>
+          <p:nvPr/>
+        </p:nvSpPr>
+        <p:spPr>
+          <a:xfrm>
+            <a:off x="274320" y="6601968"/>
+            <a:ext cx="4572000" cy="228600"/>
+          </a:xfrm>
+          <a:prstGeom prst="rect">
+            <a:avLst/>
+          </a:prstGeom>
+          <a:noFill/>
+        </p:spPr>
+        <p:txBody>
+          <a:bodyPr wrap="none">
+            <a:spAutoFit/>
+          </a:bodyPr>
+          <a:lstStyle/>
+          <a:p>
+            <a:pPr algn="l">
+              <a:defRPr sz="1000" b="0">
+                <a:solidFill>
+                  <a:srgbClr val="555555"/>
+                </a:solidFill>
+                <a:latin typeface="Arial"/>
+              </a:defRPr>
+            </a:pPr>
+            <a:r>
+              <a:t>Test: La ciudad</a:t>
+            </a:r>
+          </a:p>
+        </p:txBody>
+      </p:sp>
+      <p:sp>
+        <p:nvSpPr>
+          <p:cNvPr id="6" name="TextBox 5"/>
+          <p:cNvSpPr txBox="1"/>
+          <p:nvPr/>
+        </p:nvSpPr>
+        <p:spPr>
+          <a:xfrm>
+            <a:off x="9144000" y="6601968"/>
+            <a:ext cx="2743200" cy="228600"/>
+          </a:xfrm>
+          <a:prstGeom prst="rect">
+            <a:avLst/>
+          </a:prstGeom>
+          <a:noFill/>
+        </p:spPr>
+        <p:txBody>
+          <a:bodyPr wrap="none">
+            <a:spAutoFit/>
+          </a:bodyPr>
+          <a:lstStyle/>
+          <a:p>
+            <a:pPr algn="r">
+              <a:defRPr sz="1000" b="0">
+                <a:solidFill>
+                  <a:srgbClr val="555555"/>
+                </a:solidFill>
+                <a:latin typeface="Arial"/>
+              </a:defRPr>
+            </a:pPr>
+            <a:r>
+              <a:t>Sequenz 6</a:t>
+            </a:r>
+          </a:p>
+        </p:txBody>
+      </p:sp>
+      <p:sp>
+        <p:nvSpPr>
+          <p:cNvPr id="7" name="TextBox 6"/>
+          <p:cNvSpPr txBox="1"/>
+          <p:nvPr/>
+        </p:nvSpPr>
+        <p:spPr>
+          <a:xfrm>
+            <a:off x="457200" y="640080"/>
+            <a:ext cx="11274552" cy="731520"/>
+          </a:xfrm>
+          <a:prstGeom prst="rect">
+            <a:avLst/>
+          </a:prstGeom>
+          <a:noFill/>
+        </p:spPr>
+        <p:txBody>
+          <a:bodyPr wrap="none">
+            <a:spAutoFit/>
+          </a:bodyPr>
+          <a:lstStyle/>
+          <a:p>
+            <a:pPr algn="l">
+              <a:defRPr sz="3200" b="1">
+                <a:solidFill>
+                  <a:srgbClr val="C41E3A"/>
+                </a:solidFill>
+                <a:latin typeface="Arial"/>
+              </a:defRPr>
+            </a:pPr>
+            <a:r>
+              <a:t>Minitest: Überblick</a:t>
+            </a:r>
+          </a:p>
+        </p:txBody>
+      </p:sp>
+      <p:sp>
+        <p:nvSpPr>
+          <p:cNvPr id="8" name="TextBox 7"/>
+          <p:cNvSpPr txBox="1"/>
+          <p:nvPr/>
+        </p:nvSpPr>
+        <p:spPr>
+          <a:xfrm>
+            <a:off x="640080" y="1463040"/>
+            <a:ext cx="10972800" cy="548640"/>
+          </a:xfrm>
+          <a:prstGeom prst="rect">
+            <a:avLst/>
+          </a:prstGeom>
+          <a:noFill/>
+        </p:spPr>
+        <p:txBody>
+          <a:bodyPr wrap="none">
+            <a:spAutoFit/>
+          </a:bodyPr>
+          <a:lstStyle/>
+          <a:p>
+            <a:pPr algn="l">
+              <a:defRPr sz="2000" b="0">
+                <a:solidFill>
+                  <a:srgbClr val="222222"/>
+                </a:solidFill>
+                <a:latin typeface="Arial"/>
+              </a:defRPr>
+            </a:pPr>
+            <a:r>
+              <a:t>Teil 1: Ortsvokabeln (6 P)</a:t>
+            </a:r>
+          </a:p>
+        </p:txBody>
+      </p:sp>
+      <p:sp>
+        <p:nvSpPr>
+          <p:cNvPr id="9" name="TextBox 8"/>
+          <p:cNvSpPr txBox="1"/>
+          <p:nvPr/>
+        </p:nvSpPr>
+        <p:spPr>
+          <a:xfrm>
+            <a:off x="640080" y="2194560"/>
+            <a:ext cx="10972800" cy="548640"/>
+          </a:xfrm>
+          <a:prstGeom prst="rect">
+            <a:avLst/>
+          </a:prstGeom>
+          <a:noFill/>
+        </p:spPr>
+        <p:txBody>
+          <a:bodyPr wrap="none">
+            <a:spAutoFit/>
+          </a:bodyPr>
+          <a:lstStyle/>
+          <a:p>
+            <a:pPr algn="l">
+              <a:defRPr sz="2000" b="0">
+                <a:solidFill>
+                  <a:srgbClr val="222222"/>
+                </a:solidFill>
+                <a:latin typeface="Arial"/>
+              </a:defRPr>
+            </a:pPr>
+            <a:r>
+              <a:t>Teil 2: ir konjugieren (4 P)</a:t>
+            </a:r>
+          </a:p>
+        </p:txBody>
+      </p:sp>
+      <p:sp>
+        <p:nvSpPr>
+          <p:cNvPr id="10" name="TextBox 9"/>
+          <p:cNvSpPr txBox="1"/>
+          <p:nvPr/>
+        </p:nvSpPr>
+        <p:spPr>
+          <a:xfrm>
+            <a:off x="640080" y="2926080"/>
+            <a:ext cx="10972800" cy="548640"/>
+          </a:xfrm>
+          <a:prstGeom prst="rect">
+            <a:avLst/>
+          </a:prstGeom>
+          <a:noFill/>
+        </p:spPr>
+        <p:txBody>
+          <a:bodyPr wrap="none">
+            <a:spAutoFit/>
+          </a:bodyPr>
+          <a:lstStyle/>
+          <a:p>
+            <a:pPr algn="l">
+              <a:defRPr sz="2000" b="0">
+                <a:solidFill>
+                  <a:srgbClr val="222222"/>
+                </a:solidFill>
+                <a:latin typeface="Arial"/>
+              </a:defRPr>
+            </a:pPr>
+            <a:r>
+              <a:t>Teil 3: estar konjugieren (4 P)</a:t>
+            </a:r>
+          </a:p>
+        </p:txBody>
+      </p:sp>
+      <p:sp>
+        <p:nvSpPr>
+          <p:cNvPr id="11" name="TextBox 10"/>
+          <p:cNvSpPr txBox="1"/>
+          <p:nvPr/>
+        </p:nvSpPr>
+        <p:spPr>
+          <a:xfrm>
+            <a:off x="640080" y="3657600"/>
+            <a:ext cx="10972800" cy="548640"/>
+          </a:xfrm>
+          <a:prstGeom prst="rect">
+            <a:avLst/>
+          </a:prstGeom>
+          <a:noFill/>
+        </p:spPr>
+        <p:txBody>
+          <a:bodyPr wrap="none">
+            <a:spAutoFit/>
+          </a:bodyPr>
+          <a:lstStyle/>
+          <a:p>
+            <a:pPr algn="l">
+              <a:defRPr sz="2000" b="0">
+                <a:solidFill>
+                  <a:srgbClr val="222222"/>
+                </a:solidFill>
+                <a:latin typeface="Arial"/>
+              </a:defRPr>
+            </a:pPr>
+            <a:r>
+              <a:t>Teil 4: Richtungen (6 P)</a:t>
+            </a:r>
+          </a:p>
+        </p:txBody>
+      </p:sp>
+      <p:sp>
+        <p:nvSpPr>
+          <p:cNvPr id="12" name="TextBox 11"/>
+          <p:cNvSpPr txBox="1"/>
+          <p:nvPr/>
+        </p:nvSpPr>
+        <p:spPr>
+          <a:xfrm>
+            <a:off x="640080" y="4389120"/>
+            <a:ext cx="10972800" cy="548640"/>
+          </a:xfrm>
+          <a:prstGeom prst="rect">
+            <a:avLst/>
+          </a:prstGeom>
+          <a:noFill/>
+        </p:spPr>
+        <p:txBody>
+          <a:bodyPr wrap="none">
+            <a:spAutoFit/>
+          </a:bodyPr>
+          <a:lstStyle/>
+          <a:p>
+            <a:pPr algn="l">
+              <a:defRPr sz="2000" b="0">
+                <a:solidFill>
+                  <a:srgbClr val="222222"/>
+                </a:solidFill>
+                <a:latin typeface="Arial"/>
+              </a:defRPr>
+            </a:pPr>
+            <a:r>
+              <a:t>Teil 5: Wegbeschreibung (5 P)</a:t>
+            </a:r>
+          </a:p>
+        </p:txBody>
+      </p:sp>
+    </p:spTree>
+  </p:cSld>
+  <p:clrMapOvr>
+    <a:masterClrMapping/>
+  </p:clrMapOvr>
+</p:sld>
+</file>
+
+<file path=ppt/slides/slide6.xml><?xml version="1.0" encoding="utf-8"?>
+<p:sld xmlns:a="http://schemas.openxmlformats.org/drawingml/2006/main" xmlns:p="http://schemas.openxmlformats.org/presentationml/2006/main" xmlns:r="http://schemas.openxmlformats.org/officeDocument/2006/relationships">
+  <p:cSld>
+    <p:spTree>
+      <p:nvGrpSpPr>
+        <p:cNvPr id="1" name=""/>
+        <p:cNvGrpSpPr/>
+        <p:nvPr/>
+      </p:nvGrpSpPr>
+      <p:grpSpPr/>
+      <p:sp>
+        <p:nvSpPr>
+          <p:cNvPr id="2" name="Rectangle 1"/>
+          <p:cNvSpPr/>
+          <p:nvPr/>
+        </p:nvSpPr>
+        <p:spPr>
+          <a:xfrm>
+            <a:off x="0" y="0"/>
+            <a:ext cx="12191695" cy="457200"/>
+          </a:xfrm>
+          <a:prstGeom prst="rect">
+            <a:avLst/>
+          </a:prstGeom>
+          <a:solidFill>
+            <a:srgbClr val="C41E3A"/>
+          </a:solidFill>
+          <a:ln>
+            <a:noFill/>
+          </a:ln>
+        </p:spPr>
+        <p:style>
+          <a:lnRef idx="1">
+            <a:schemeClr val="accent1"/>
+          </a:lnRef>
+          <a:fillRef idx="3">
+            <a:schemeClr val="accent1"/>
+          </a:fillRef>
+          <a:effectRef idx="2">
+            <a:schemeClr val="accent1"/>
+          </a:effectRef>
+          <a:fontRef idx="minor">
+            <a:schemeClr val="lt1"/>
+          </a:fontRef>
+        </p:style>
+        <p:txBody>
+          <a:bodyPr rtlCol="0" anchor="ctr"/>
+          <a:lstStyle/>
+          <a:p>
+            <a:pPr algn="ctr"/>
+          </a:p>
+        </p:txBody>
+      </p:sp>
+      <p:sp>
+        <p:nvSpPr>
+          <p:cNvPr id="3" name="TextBox 2"/>
+          <p:cNvSpPr txBox="1"/>
+          <p:nvPr/>
+        </p:nvSpPr>
+        <p:spPr>
+          <a:xfrm>
+            <a:off x="274320" y="91440"/>
+            <a:ext cx="3657600" cy="274320"/>
+          </a:xfrm>
+          <a:prstGeom prst="rect">
+            <a:avLst/>
+          </a:prstGeom>
+          <a:noFill/>
+        </p:spPr>
+        <p:txBody>
+          <a:bodyPr wrap="none">
+            <a:spAutoFit/>
+          </a:bodyPr>
+          <a:lstStyle/>
+          <a:p>
+            <a:pPr algn="l">
+              <a:defRPr sz="1400" b="1">
+                <a:solidFill>
+                  <a:srgbClr val="FFFFFF"/>
+                </a:solidFill>
+                <a:latin typeface="Arial"/>
+              </a:defRPr>
+            </a:pPr>
+            <a:r>
+              <a:t>Spanisch Klasse 7 · LP-06d</a:t>
+            </a:r>
+          </a:p>
+        </p:txBody>
+      </p:sp>
+      <p:sp>
+        <p:nvSpPr>
+          <p:cNvPr id="4" name="Rectangle 3"/>
+          <p:cNvSpPr/>
+          <p:nvPr/>
+        </p:nvSpPr>
+        <p:spPr>
+          <a:xfrm>
+            <a:off x="0" y="6583680"/>
+            <a:ext cx="12191695" cy="274320"/>
+          </a:xfrm>
+          <a:prstGeom prst="rect">
+            <a:avLst/>
+          </a:prstGeom>
+          <a:solidFill>
+            <a:srgbClr val="F5F5F5"/>
+          </a:solidFill>
+          <a:ln>
+            <a:noFill/>
+          </a:ln>
+        </p:spPr>
+        <p:style>
+          <a:lnRef idx="1">
+            <a:schemeClr val="accent1"/>
+          </a:lnRef>
+          <a:fillRef idx="3">
+            <a:schemeClr val="accent1"/>
+          </a:fillRef>
+          <a:effectRef idx="2">
+            <a:schemeClr val="accent1"/>
+          </a:effectRef>
+          <a:fontRef idx="minor">
+            <a:schemeClr val="lt1"/>
+          </a:fontRef>
+        </p:style>
+        <p:txBody>
+          <a:bodyPr rtlCol="0" anchor="ctr"/>
+          <a:lstStyle/>
+          <a:p>
+            <a:pPr algn="ctr"/>
+          </a:p>
+        </p:txBody>
+      </p:sp>
+      <p:sp>
+        <p:nvSpPr>
+          <p:cNvPr id="5" name="TextBox 4"/>
+          <p:cNvSpPr txBox="1"/>
+          <p:nvPr/>
+        </p:nvSpPr>
+        <p:spPr>
+          <a:xfrm>
+            <a:off x="274320" y="6601968"/>
+            <a:ext cx="4572000" cy="228600"/>
+          </a:xfrm>
+          <a:prstGeom prst="rect">
+            <a:avLst/>
+          </a:prstGeom>
+          <a:noFill/>
+        </p:spPr>
+        <p:txBody>
+          <a:bodyPr wrap="none">
+            <a:spAutoFit/>
+          </a:bodyPr>
+          <a:lstStyle/>
+          <a:p>
+            <a:pPr algn="l">
+              <a:defRPr sz="1000" b="0">
+                <a:solidFill>
+                  <a:srgbClr val="555555"/>
+                </a:solidFill>
+                <a:latin typeface="Arial"/>
+              </a:defRPr>
+            </a:pPr>
+            <a:r>
+              <a:t>Test: La ciudad</a:t>
+            </a:r>
+          </a:p>
+        </p:txBody>
+      </p:sp>
+      <p:sp>
+        <p:nvSpPr>
+          <p:cNvPr id="6" name="TextBox 5"/>
+          <p:cNvSpPr txBox="1"/>
+          <p:nvPr/>
+        </p:nvSpPr>
+        <p:spPr>
+          <a:xfrm>
+            <a:off x="9144000" y="6601968"/>
+            <a:ext cx="2743200" cy="228600"/>
+          </a:xfrm>
+          <a:prstGeom prst="rect">
+            <a:avLst/>
+          </a:prstGeom>
+          <a:noFill/>
+        </p:spPr>
+        <p:txBody>
+          <a:bodyPr wrap="none">
+            <a:spAutoFit/>
+          </a:bodyPr>
+          <a:lstStyle/>
+          <a:p>
+            <a:pPr algn="r">
+              <a:defRPr sz="1000" b="0">
+                <a:solidFill>
+                  <a:srgbClr val="555555"/>
+                </a:solidFill>
+                <a:latin typeface="Arial"/>
+              </a:defRPr>
+            </a:pPr>
+            <a:r>
+              <a:t>Sequenz 6</a:t>
+            </a:r>
+          </a:p>
+        </p:txBody>
+      </p:sp>
+      <p:sp>
+        <p:nvSpPr>
+          <p:cNvPr id="7" name="Rectangle 6"/>
+          <p:cNvSpPr/>
+          <p:nvPr/>
+        </p:nvSpPr>
+        <p:spPr>
+          <a:xfrm>
+            <a:off x="457200" y="640080"/>
+            <a:ext cx="1828800" cy="457200"/>
+          </a:xfrm>
+          <a:prstGeom prst="rect">
+            <a:avLst/>
+          </a:prstGeom>
+          <a:solidFill>
+            <a:srgbClr val="C41E3A"/>
+          </a:solidFill>
+          <a:ln>
+            <a:noFill/>
+          </a:ln>
+        </p:spPr>
+        <p:style>
+          <a:lnRef idx="1">
+            <a:schemeClr val="accent1"/>
+          </a:lnRef>
+          <a:fillRef idx="3">
+            <a:schemeClr val="accent1"/>
+          </a:fillRef>
+          <a:effectRef idx="2">
+            <a:schemeClr val="accent1"/>
+          </a:effectRef>
+          <a:fontRef idx="minor">
+            <a:schemeClr val="lt1"/>
+          </a:fontRef>
+        </p:style>
+        <p:txBody>
+          <a:bodyPr rtlCol="0" anchor="ctr"/>
+          <a:lstStyle/>
+          <a:p>
+            <a:pPr algn="ctr"/>
+          </a:p>
+        </p:txBody>
+      </p:sp>
+      <p:sp>
+        <p:nvSpPr>
           <p:cNvPr id="8" name="TextBox 7"/>
           <p:cNvSpPr txBox="1"/>
           <p:nvPr/>
@@ -4063,7 +5386,7 @@
               </a:defRPr>
             </a:pPr>
             <a:r>
-              <a:t>HAUSAUFGABE</a:t>
+              <a:t>ÜBUNG</a:t>
             </a:r>
           </a:p>
         </p:txBody>
@@ -4099,6 +5422,1466 @@
               </a:defRPr>
             </a:pPr>
             <a:r>
+              <a:t>✏️ Probe: Orte</a:t>
+            </a:r>
+          </a:p>
+        </p:txBody>
+      </p:sp>
+      <p:sp>
+        <p:nvSpPr>
+          <p:cNvPr id="10" name="TextBox 9"/>
+          <p:cNvSpPr txBox="1"/>
+          <p:nvPr/>
+        </p:nvSpPr>
+        <p:spPr>
+          <a:xfrm>
+            <a:off x="640080" y="2011680"/>
+            <a:ext cx="5029200" cy="548640"/>
+          </a:xfrm>
+          <a:prstGeom prst="rect">
+            <a:avLst/>
+          </a:prstGeom>
+          <a:noFill/>
+        </p:spPr>
+        <p:txBody>
+          <a:bodyPr wrap="none">
+            <a:spAutoFit/>
+          </a:bodyPr>
+          <a:lstStyle/>
+          <a:p>
+            <a:pPr algn="l">
+              <a:defRPr sz="2200" b="1">
+                <a:solidFill>
+                  <a:srgbClr val="C41E3A"/>
+                </a:solidFill>
+                <a:latin typeface="Arial"/>
+              </a:defRPr>
+            </a:pPr>
+            <a:r>
+              <a:t>Kino =</a:t>
+            </a:r>
+          </a:p>
+        </p:txBody>
+      </p:sp>
+      <p:sp>
+        <p:nvSpPr>
+          <p:cNvPr id="11" name="TextBox 10"/>
+          <p:cNvSpPr txBox="1"/>
+          <p:nvPr/>
+        </p:nvSpPr>
+        <p:spPr>
+          <a:xfrm>
+            <a:off x="5943600" y="2011680"/>
+            <a:ext cx="5029200" cy="548640"/>
+          </a:xfrm>
+          <a:prstGeom prst="rect">
+            <a:avLst/>
+          </a:prstGeom>
+          <a:noFill/>
+        </p:spPr>
+        <p:txBody>
+          <a:bodyPr wrap="none">
+            <a:spAutoFit/>
+          </a:bodyPr>
+          <a:lstStyle/>
+          <a:p>
+            <a:pPr algn="l">
+              <a:defRPr sz="2200" b="0">
+                <a:solidFill>
+                  <a:srgbClr val="888888"/>
+                </a:solidFill>
+                <a:latin typeface="Arial"/>
+              </a:defRPr>
+            </a:pPr>
+            <a:r>
+              <a:t>___</a:t>
+            </a:r>
+          </a:p>
+        </p:txBody>
+      </p:sp>
+      <p:sp>
+        <p:nvSpPr>
+          <p:cNvPr id="12" name="TextBox 11"/>
+          <p:cNvSpPr txBox="1"/>
+          <p:nvPr/>
+        </p:nvSpPr>
+        <p:spPr>
+          <a:xfrm>
+            <a:off x="640080" y="2926080"/>
+            <a:ext cx="5029200" cy="548640"/>
+          </a:xfrm>
+          <a:prstGeom prst="rect">
+            <a:avLst/>
+          </a:prstGeom>
+          <a:noFill/>
+        </p:spPr>
+        <p:txBody>
+          <a:bodyPr wrap="none">
+            <a:spAutoFit/>
+          </a:bodyPr>
+          <a:lstStyle/>
+          <a:p>
+            <a:pPr algn="l">
+              <a:defRPr sz="2200" b="1">
+                <a:solidFill>
+                  <a:srgbClr val="C41E3A"/>
+                </a:solidFill>
+                <a:latin typeface="Arial"/>
+              </a:defRPr>
+            </a:pPr>
+            <a:r>
+              <a:t>Bibliothek =</a:t>
+            </a:r>
+          </a:p>
+        </p:txBody>
+      </p:sp>
+      <p:sp>
+        <p:nvSpPr>
+          <p:cNvPr id="13" name="TextBox 12"/>
+          <p:cNvSpPr txBox="1"/>
+          <p:nvPr/>
+        </p:nvSpPr>
+        <p:spPr>
+          <a:xfrm>
+            <a:off x="5943600" y="2926080"/>
+            <a:ext cx="5029200" cy="548640"/>
+          </a:xfrm>
+          <a:prstGeom prst="rect">
+            <a:avLst/>
+          </a:prstGeom>
+          <a:noFill/>
+        </p:spPr>
+        <p:txBody>
+          <a:bodyPr wrap="none">
+            <a:spAutoFit/>
+          </a:bodyPr>
+          <a:lstStyle/>
+          <a:p>
+            <a:pPr algn="l">
+              <a:defRPr sz="2200" b="0">
+                <a:solidFill>
+                  <a:srgbClr val="888888"/>
+                </a:solidFill>
+                <a:latin typeface="Arial"/>
+              </a:defRPr>
+            </a:pPr>
+            <a:r>
+              <a:t>___</a:t>
+            </a:r>
+          </a:p>
+        </p:txBody>
+      </p:sp>
+      <p:sp>
+        <p:nvSpPr>
+          <p:cNvPr id="14" name="Rectangle 13"/>
+          <p:cNvSpPr/>
+          <p:nvPr/>
+        </p:nvSpPr>
+        <p:spPr>
+          <a:xfrm>
+            <a:off x="457200" y="5943600"/>
+            <a:ext cx="11274552" cy="548640"/>
+          </a:xfrm>
+          <a:prstGeom prst="rect">
+            <a:avLst/>
+          </a:prstGeom>
+          <a:solidFill>
+            <a:srgbClr val="FDF2F4"/>
+          </a:solidFill>
+          <a:ln>
+            <a:solidFill>
+              <a:srgbClr val="C41E3A"/>
+            </a:solidFill>
+          </a:ln>
+        </p:spPr>
+        <p:style>
+          <a:lnRef idx="1">
+            <a:schemeClr val="accent1"/>
+          </a:lnRef>
+          <a:fillRef idx="3">
+            <a:schemeClr val="accent1"/>
+          </a:fillRef>
+          <a:effectRef idx="2">
+            <a:schemeClr val="accent1"/>
+          </a:effectRef>
+          <a:fontRef idx="minor">
+            <a:schemeClr val="lt1"/>
+          </a:fontRef>
+        </p:style>
+        <p:txBody>
+          <a:bodyPr rtlCol="0" anchor="ctr"/>
+          <a:lstStyle/>
+          <a:p>
+            <a:pPr algn="ctr"/>
+          </a:p>
+        </p:txBody>
+      </p:sp>
+      <p:sp>
+        <p:nvSpPr>
+          <p:cNvPr id="15" name="TextBox 14"/>
+          <p:cNvSpPr txBox="1"/>
+          <p:nvPr/>
+        </p:nvSpPr>
+        <p:spPr>
+          <a:xfrm>
+            <a:off x="640080" y="6053328"/>
+            <a:ext cx="10972800" cy="365760"/>
+          </a:xfrm>
+          <a:prstGeom prst="rect">
+            <a:avLst/>
+          </a:prstGeom>
+          <a:noFill/>
+        </p:spPr>
+        <p:txBody>
+          <a:bodyPr wrap="none">
+            <a:spAutoFit/>
+          </a:bodyPr>
+          <a:lstStyle/>
+          <a:p>
+            <a:pPr algn="l">
+              <a:defRPr sz="1400" b="1">
+                <a:solidFill>
+                  <a:srgbClr val="C41E3A"/>
+                </a:solidFill>
+                <a:latin typeface="Arial"/>
+              </a:defRPr>
+            </a:pPr>
+            <a:r>
+              <a:t>📝 MT-06d</a:t>
+            </a:r>
+          </a:p>
+        </p:txBody>
+      </p:sp>
+    </p:spTree>
+  </p:cSld>
+  <p:clrMapOvr>
+    <a:masterClrMapping/>
+  </p:clrMapOvr>
+</p:sld>
+</file>
+
+<file path=ppt/slides/slide7.xml><?xml version="1.0" encoding="utf-8"?>
+<p:sld xmlns:a="http://schemas.openxmlformats.org/drawingml/2006/main" xmlns:p="http://schemas.openxmlformats.org/presentationml/2006/main" xmlns:r="http://schemas.openxmlformats.org/officeDocument/2006/relationships">
+  <p:cSld>
+    <p:spTree>
+      <p:nvGrpSpPr>
+        <p:cNvPr id="1" name=""/>
+        <p:cNvGrpSpPr/>
+        <p:nvPr/>
+      </p:nvGrpSpPr>
+      <p:grpSpPr/>
+      <p:sp>
+        <p:nvSpPr>
+          <p:cNvPr id="2" name="Rectangle 1"/>
+          <p:cNvSpPr/>
+          <p:nvPr/>
+        </p:nvSpPr>
+        <p:spPr>
+          <a:xfrm>
+            <a:off x="0" y="0"/>
+            <a:ext cx="12191695" cy="457200"/>
+          </a:xfrm>
+          <a:prstGeom prst="rect">
+            <a:avLst/>
+          </a:prstGeom>
+          <a:solidFill>
+            <a:srgbClr val="C41E3A"/>
+          </a:solidFill>
+          <a:ln>
+            <a:noFill/>
+          </a:ln>
+        </p:spPr>
+        <p:style>
+          <a:lnRef idx="1">
+            <a:schemeClr val="accent1"/>
+          </a:lnRef>
+          <a:fillRef idx="3">
+            <a:schemeClr val="accent1"/>
+          </a:fillRef>
+          <a:effectRef idx="2">
+            <a:schemeClr val="accent1"/>
+          </a:effectRef>
+          <a:fontRef idx="minor">
+            <a:schemeClr val="lt1"/>
+          </a:fontRef>
+        </p:style>
+        <p:txBody>
+          <a:bodyPr rtlCol="0" anchor="ctr"/>
+          <a:lstStyle/>
+          <a:p>
+            <a:pPr algn="ctr"/>
+          </a:p>
+        </p:txBody>
+      </p:sp>
+      <p:sp>
+        <p:nvSpPr>
+          <p:cNvPr id="3" name="TextBox 2"/>
+          <p:cNvSpPr txBox="1"/>
+          <p:nvPr/>
+        </p:nvSpPr>
+        <p:spPr>
+          <a:xfrm>
+            <a:off x="274320" y="91440"/>
+            <a:ext cx="3657600" cy="274320"/>
+          </a:xfrm>
+          <a:prstGeom prst="rect">
+            <a:avLst/>
+          </a:prstGeom>
+          <a:noFill/>
+        </p:spPr>
+        <p:txBody>
+          <a:bodyPr wrap="none">
+            <a:spAutoFit/>
+          </a:bodyPr>
+          <a:lstStyle/>
+          <a:p>
+            <a:pPr algn="l">
+              <a:defRPr sz="1400" b="1">
+                <a:solidFill>
+                  <a:srgbClr val="FFFFFF"/>
+                </a:solidFill>
+                <a:latin typeface="Arial"/>
+              </a:defRPr>
+            </a:pPr>
+            <a:r>
+              <a:t>Spanisch Klasse 7 · LP-06d</a:t>
+            </a:r>
+          </a:p>
+        </p:txBody>
+      </p:sp>
+      <p:sp>
+        <p:nvSpPr>
+          <p:cNvPr id="4" name="Rectangle 3"/>
+          <p:cNvSpPr/>
+          <p:nvPr/>
+        </p:nvSpPr>
+        <p:spPr>
+          <a:xfrm>
+            <a:off x="0" y="6583680"/>
+            <a:ext cx="12191695" cy="274320"/>
+          </a:xfrm>
+          <a:prstGeom prst="rect">
+            <a:avLst/>
+          </a:prstGeom>
+          <a:solidFill>
+            <a:srgbClr val="F5F5F5"/>
+          </a:solidFill>
+          <a:ln>
+            <a:noFill/>
+          </a:ln>
+        </p:spPr>
+        <p:style>
+          <a:lnRef idx="1">
+            <a:schemeClr val="accent1"/>
+          </a:lnRef>
+          <a:fillRef idx="3">
+            <a:schemeClr val="accent1"/>
+          </a:fillRef>
+          <a:effectRef idx="2">
+            <a:schemeClr val="accent1"/>
+          </a:effectRef>
+          <a:fontRef idx="minor">
+            <a:schemeClr val="lt1"/>
+          </a:fontRef>
+        </p:style>
+        <p:txBody>
+          <a:bodyPr rtlCol="0" anchor="ctr"/>
+          <a:lstStyle/>
+          <a:p>
+            <a:pPr algn="ctr"/>
+          </a:p>
+        </p:txBody>
+      </p:sp>
+      <p:sp>
+        <p:nvSpPr>
+          <p:cNvPr id="5" name="TextBox 4"/>
+          <p:cNvSpPr txBox="1"/>
+          <p:nvPr/>
+        </p:nvSpPr>
+        <p:spPr>
+          <a:xfrm>
+            <a:off x="274320" y="6601968"/>
+            <a:ext cx="4572000" cy="228600"/>
+          </a:xfrm>
+          <a:prstGeom prst="rect">
+            <a:avLst/>
+          </a:prstGeom>
+          <a:noFill/>
+        </p:spPr>
+        <p:txBody>
+          <a:bodyPr wrap="none">
+            <a:spAutoFit/>
+          </a:bodyPr>
+          <a:lstStyle/>
+          <a:p>
+            <a:pPr algn="l">
+              <a:defRPr sz="1000" b="0">
+                <a:solidFill>
+                  <a:srgbClr val="555555"/>
+                </a:solidFill>
+                <a:latin typeface="Arial"/>
+              </a:defRPr>
+            </a:pPr>
+            <a:r>
+              <a:t>Test: La ciudad</a:t>
+            </a:r>
+          </a:p>
+        </p:txBody>
+      </p:sp>
+      <p:sp>
+        <p:nvSpPr>
+          <p:cNvPr id="6" name="TextBox 5"/>
+          <p:cNvSpPr txBox="1"/>
+          <p:nvPr/>
+        </p:nvSpPr>
+        <p:spPr>
+          <a:xfrm>
+            <a:off x="9144000" y="6601968"/>
+            <a:ext cx="2743200" cy="228600"/>
+          </a:xfrm>
+          <a:prstGeom prst="rect">
+            <a:avLst/>
+          </a:prstGeom>
+          <a:noFill/>
+        </p:spPr>
+        <p:txBody>
+          <a:bodyPr wrap="none">
+            <a:spAutoFit/>
+          </a:bodyPr>
+          <a:lstStyle/>
+          <a:p>
+            <a:pPr algn="r">
+              <a:defRPr sz="1000" b="0">
+                <a:solidFill>
+                  <a:srgbClr val="555555"/>
+                </a:solidFill>
+                <a:latin typeface="Arial"/>
+              </a:defRPr>
+            </a:pPr>
+            <a:r>
+              <a:t>Sequenz 6</a:t>
+            </a:r>
+          </a:p>
+        </p:txBody>
+      </p:sp>
+      <p:sp>
+        <p:nvSpPr>
+          <p:cNvPr id="7" name="Rectangle 6"/>
+          <p:cNvSpPr/>
+          <p:nvPr/>
+        </p:nvSpPr>
+        <p:spPr>
+          <a:xfrm>
+            <a:off x="457200" y="640080"/>
+            <a:ext cx="1828800" cy="457200"/>
+          </a:xfrm>
+          <a:prstGeom prst="rect">
+            <a:avLst/>
+          </a:prstGeom>
+          <a:solidFill>
+            <a:srgbClr val="C41E3A"/>
+          </a:solidFill>
+          <a:ln>
+            <a:noFill/>
+          </a:ln>
+        </p:spPr>
+        <p:style>
+          <a:lnRef idx="1">
+            <a:schemeClr val="accent1"/>
+          </a:lnRef>
+          <a:fillRef idx="3">
+            <a:schemeClr val="accent1"/>
+          </a:fillRef>
+          <a:effectRef idx="2">
+            <a:schemeClr val="accent1"/>
+          </a:effectRef>
+          <a:fontRef idx="minor">
+            <a:schemeClr val="lt1"/>
+          </a:fontRef>
+        </p:style>
+        <p:txBody>
+          <a:bodyPr rtlCol="0" anchor="ctr"/>
+          <a:lstStyle/>
+          <a:p>
+            <a:pPr algn="ctr"/>
+          </a:p>
+        </p:txBody>
+      </p:sp>
+      <p:sp>
+        <p:nvSpPr>
+          <p:cNvPr id="8" name="TextBox 7"/>
+          <p:cNvSpPr txBox="1"/>
+          <p:nvPr/>
+        </p:nvSpPr>
+        <p:spPr>
+          <a:xfrm>
+            <a:off x="548640" y="713231"/>
+            <a:ext cx="1645920" cy="320040"/>
+          </a:xfrm>
+          <a:prstGeom prst="rect">
+            <a:avLst/>
+          </a:prstGeom>
+          <a:noFill/>
+        </p:spPr>
+        <p:txBody>
+          <a:bodyPr wrap="none">
+            <a:spAutoFit/>
+          </a:bodyPr>
+          <a:lstStyle/>
+          <a:p>
+            <a:pPr algn="ctr">
+              <a:defRPr sz="1400" b="1">
+                <a:solidFill>
+                  <a:srgbClr val="FFFFFF"/>
+                </a:solidFill>
+                <a:latin typeface="Arial"/>
+              </a:defRPr>
+            </a:pPr>
+            <a:r>
+              <a:t>ÜBUNG</a:t>
+            </a:r>
+          </a:p>
+        </p:txBody>
+      </p:sp>
+      <p:sp>
+        <p:nvSpPr>
+          <p:cNvPr id="9" name="TextBox 8"/>
+          <p:cNvSpPr txBox="1"/>
+          <p:nvPr/>
+        </p:nvSpPr>
+        <p:spPr>
+          <a:xfrm>
+            <a:off x="457200" y="1280160"/>
+            <a:ext cx="11274552" cy="731520"/>
+          </a:xfrm>
+          <a:prstGeom prst="rect">
+            <a:avLst/>
+          </a:prstGeom>
+          <a:noFill/>
+        </p:spPr>
+        <p:txBody>
+          <a:bodyPr wrap="none">
+            <a:spAutoFit/>
+          </a:bodyPr>
+          <a:lstStyle/>
+          <a:p>
+            <a:pPr algn="l">
+              <a:defRPr sz="3200" b="1">
+                <a:solidFill>
+                  <a:srgbClr val="C41E3A"/>
+                </a:solidFill>
+                <a:latin typeface="Arial"/>
+              </a:defRPr>
+            </a:pPr>
+            <a:r>
+              <a:t>✏️ Probe: ir/estar</a:t>
+            </a:r>
+          </a:p>
+        </p:txBody>
+      </p:sp>
+      <p:sp>
+        <p:nvSpPr>
+          <p:cNvPr id="10" name="TextBox 9"/>
+          <p:cNvSpPr txBox="1"/>
+          <p:nvPr/>
+        </p:nvSpPr>
+        <p:spPr>
+          <a:xfrm>
+            <a:off x="640080" y="2011680"/>
+            <a:ext cx="5029200" cy="548640"/>
+          </a:xfrm>
+          <a:prstGeom prst="rect">
+            <a:avLst/>
+          </a:prstGeom>
+          <a:noFill/>
+        </p:spPr>
+        <p:txBody>
+          <a:bodyPr wrap="none">
+            <a:spAutoFit/>
+          </a:bodyPr>
+          <a:lstStyle/>
+          <a:p>
+            <a:pPr algn="l">
+              <a:defRPr sz="2200" b="1">
+                <a:solidFill>
+                  <a:srgbClr val="C41E3A"/>
+                </a:solidFill>
+                <a:latin typeface="Arial"/>
+              </a:defRPr>
+            </a:pPr>
+            <a:r>
+              <a:t>Yo ___ al cine. (ir)</a:t>
+            </a:r>
+          </a:p>
+        </p:txBody>
+      </p:sp>
+      <p:sp>
+        <p:nvSpPr>
+          <p:cNvPr id="11" name="TextBox 10"/>
+          <p:cNvSpPr txBox="1"/>
+          <p:nvPr/>
+        </p:nvSpPr>
+        <p:spPr>
+          <a:xfrm>
+            <a:off x="5943600" y="2011680"/>
+            <a:ext cx="5029200" cy="548640"/>
+          </a:xfrm>
+          <a:prstGeom prst="rect">
+            <a:avLst/>
+          </a:prstGeom>
+          <a:noFill/>
+        </p:spPr>
+        <p:txBody>
+          <a:bodyPr wrap="none">
+            <a:spAutoFit/>
+          </a:bodyPr>
+          <a:lstStyle/>
+          <a:p>
+            <a:pPr algn="l">
+              <a:defRPr sz="2200" b="0">
+                <a:solidFill>
+                  <a:srgbClr val="888888"/>
+                </a:solidFill>
+                <a:latin typeface="Arial"/>
+              </a:defRPr>
+            </a:pPr>
+            <a:r>
+              <a:t>___</a:t>
+            </a:r>
+          </a:p>
+        </p:txBody>
+      </p:sp>
+      <p:sp>
+        <p:nvSpPr>
+          <p:cNvPr id="12" name="TextBox 11"/>
+          <p:cNvSpPr txBox="1"/>
+          <p:nvPr/>
+        </p:nvSpPr>
+        <p:spPr>
+          <a:xfrm>
+            <a:off x="640080" y="2926080"/>
+            <a:ext cx="5029200" cy="548640"/>
+          </a:xfrm>
+          <a:prstGeom prst="rect">
+            <a:avLst/>
+          </a:prstGeom>
+          <a:noFill/>
+        </p:spPr>
+        <p:txBody>
+          <a:bodyPr wrap="none">
+            <a:spAutoFit/>
+          </a:bodyPr>
+          <a:lstStyle/>
+          <a:p>
+            <a:pPr algn="l">
+              <a:defRPr sz="2200" b="1">
+                <a:solidFill>
+                  <a:srgbClr val="C41E3A"/>
+                </a:solidFill>
+                <a:latin typeface="Arial"/>
+              </a:defRPr>
+            </a:pPr>
+            <a:r>
+              <a:t>Ella ___ en casa. (estar)</a:t>
+            </a:r>
+          </a:p>
+        </p:txBody>
+      </p:sp>
+      <p:sp>
+        <p:nvSpPr>
+          <p:cNvPr id="13" name="TextBox 12"/>
+          <p:cNvSpPr txBox="1"/>
+          <p:nvPr/>
+        </p:nvSpPr>
+        <p:spPr>
+          <a:xfrm>
+            <a:off x="5943600" y="2926080"/>
+            <a:ext cx="5029200" cy="548640"/>
+          </a:xfrm>
+          <a:prstGeom prst="rect">
+            <a:avLst/>
+          </a:prstGeom>
+          <a:noFill/>
+        </p:spPr>
+        <p:txBody>
+          <a:bodyPr wrap="none">
+            <a:spAutoFit/>
+          </a:bodyPr>
+          <a:lstStyle/>
+          <a:p>
+            <a:pPr algn="l">
+              <a:defRPr sz="2200" b="0">
+                <a:solidFill>
+                  <a:srgbClr val="888888"/>
+                </a:solidFill>
+                <a:latin typeface="Arial"/>
+              </a:defRPr>
+            </a:pPr>
+            <a:r>
+              <a:t>___</a:t>
+            </a:r>
+          </a:p>
+        </p:txBody>
+      </p:sp>
+      <p:sp>
+        <p:nvSpPr>
+          <p:cNvPr id="14" name="Rectangle 13"/>
+          <p:cNvSpPr/>
+          <p:nvPr/>
+        </p:nvSpPr>
+        <p:spPr>
+          <a:xfrm>
+            <a:off x="457200" y="5943600"/>
+            <a:ext cx="11274552" cy="548640"/>
+          </a:xfrm>
+          <a:prstGeom prst="rect">
+            <a:avLst/>
+          </a:prstGeom>
+          <a:solidFill>
+            <a:srgbClr val="FDF2F4"/>
+          </a:solidFill>
+          <a:ln>
+            <a:solidFill>
+              <a:srgbClr val="C41E3A"/>
+            </a:solidFill>
+          </a:ln>
+        </p:spPr>
+        <p:style>
+          <a:lnRef idx="1">
+            <a:schemeClr val="accent1"/>
+          </a:lnRef>
+          <a:fillRef idx="3">
+            <a:schemeClr val="accent1"/>
+          </a:fillRef>
+          <a:effectRef idx="2">
+            <a:schemeClr val="accent1"/>
+          </a:effectRef>
+          <a:fontRef idx="minor">
+            <a:schemeClr val="lt1"/>
+          </a:fontRef>
+        </p:style>
+        <p:txBody>
+          <a:bodyPr rtlCol="0" anchor="ctr"/>
+          <a:lstStyle/>
+          <a:p>
+            <a:pPr algn="ctr"/>
+          </a:p>
+        </p:txBody>
+      </p:sp>
+      <p:sp>
+        <p:nvSpPr>
+          <p:cNvPr id="15" name="TextBox 14"/>
+          <p:cNvSpPr txBox="1"/>
+          <p:nvPr/>
+        </p:nvSpPr>
+        <p:spPr>
+          <a:xfrm>
+            <a:off x="640080" y="6053328"/>
+            <a:ext cx="10972800" cy="365760"/>
+          </a:xfrm>
+          <a:prstGeom prst="rect">
+            <a:avLst/>
+          </a:prstGeom>
+          <a:noFill/>
+        </p:spPr>
+        <p:txBody>
+          <a:bodyPr wrap="none">
+            <a:spAutoFit/>
+          </a:bodyPr>
+          <a:lstStyle/>
+          <a:p>
+            <a:pPr algn="l">
+              <a:defRPr sz="1400" b="1">
+                <a:solidFill>
+                  <a:srgbClr val="C41E3A"/>
+                </a:solidFill>
+                <a:latin typeface="Arial"/>
+              </a:defRPr>
+            </a:pPr>
+            <a:r>
+              <a:t>📝 MT-06d</a:t>
+            </a:r>
+          </a:p>
+        </p:txBody>
+      </p:sp>
+    </p:spTree>
+  </p:cSld>
+  <p:clrMapOvr>
+    <a:masterClrMapping/>
+  </p:clrMapOvr>
+</p:sld>
+</file>
+
+<file path=ppt/slides/slide8.xml><?xml version="1.0" encoding="utf-8"?>
+<p:sld xmlns:a="http://schemas.openxmlformats.org/drawingml/2006/main" xmlns:p="http://schemas.openxmlformats.org/presentationml/2006/main" xmlns:r="http://schemas.openxmlformats.org/officeDocument/2006/relationships">
+  <p:cSld>
+    <p:spTree>
+      <p:nvGrpSpPr>
+        <p:cNvPr id="1" name=""/>
+        <p:cNvGrpSpPr/>
+        <p:nvPr/>
+      </p:nvGrpSpPr>
+      <p:grpSpPr/>
+      <p:sp>
+        <p:nvSpPr>
+          <p:cNvPr id="2" name="Rectangle 1"/>
+          <p:cNvSpPr/>
+          <p:nvPr/>
+        </p:nvSpPr>
+        <p:spPr>
+          <a:xfrm>
+            <a:off x="0" y="0"/>
+            <a:ext cx="12191695" cy="457200"/>
+          </a:xfrm>
+          <a:prstGeom prst="rect">
+            <a:avLst/>
+          </a:prstGeom>
+          <a:solidFill>
+            <a:srgbClr val="C41E3A"/>
+          </a:solidFill>
+          <a:ln>
+            <a:noFill/>
+          </a:ln>
+        </p:spPr>
+        <p:style>
+          <a:lnRef idx="1">
+            <a:schemeClr val="accent1"/>
+          </a:lnRef>
+          <a:fillRef idx="3">
+            <a:schemeClr val="accent1"/>
+          </a:fillRef>
+          <a:effectRef idx="2">
+            <a:schemeClr val="accent1"/>
+          </a:effectRef>
+          <a:fontRef idx="minor">
+            <a:schemeClr val="lt1"/>
+          </a:fontRef>
+        </p:style>
+        <p:txBody>
+          <a:bodyPr rtlCol="0" anchor="ctr"/>
+          <a:lstStyle/>
+          <a:p>
+            <a:pPr algn="ctr"/>
+          </a:p>
+        </p:txBody>
+      </p:sp>
+      <p:sp>
+        <p:nvSpPr>
+          <p:cNvPr id="3" name="TextBox 2"/>
+          <p:cNvSpPr txBox="1"/>
+          <p:nvPr/>
+        </p:nvSpPr>
+        <p:spPr>
+          <a:xfrm>
+            <a:off x="274320" y="91440"/>
+            <a:ext cx="3657600" cy="274320"/>
+          </a:xfrm>
+          <a:prstGeom prst="rect">
+            <a:avLst/>
+          </a:prstGeom>
+          <a:noFill/>
+        </p:spPr>
+        <p:txBody>
+          <a:bodyPr wrap="none">
+            <a:spAutoFit/>
+          </a:bodyPr>
+          <a:lstStyle/>
+          <a:p>
+            <a:pPr algn="l">
+              <a:defRPr sz="1400" b="1">
+                <a:solidFill>
+                  <a:srgbClr val="FFFFFF"/>
+                </a:solidFill>
+                <a:latin typeface="Arial"/>
+              </a:defRPr>
+            </a:pPr>
+            <a:r>
+              <a:t>Spanisch Klasse 7 · LP-06d</a:t>
+            </a:r>
+          </a:p>
+        </p:txBody>
+      </p:sp>
+      <p:sp>
+        <p:nvSpPr>
+          <p:cNvPr id="4" name="Rectangle 3"/>
+          <p:cNvSpPr/>
+          <p:nvPr/>
+        </p:nvSpPr>
+        <p:spPr>
+          <a:xfrm>
+            <a:off x="0" y="6583680"/>
+            <a:ext cx="12191695" cy="274320"/>
+          </a:xfrm>
+          <a:prstGeom prst="rect">
+            <a:avLst/>
+          </a:prstGeom>
+          <a:solidFill>
+            <a:srgbClr val="F5F5F5"/>
+          </a:solidFill>
+          <a:ln>
+            <a:noFill/>
+          </a:ln>
+        </p:spPr>
+        <p:style>
+          <a:lnRef idx="1">
+            <a:schemeClr val="accent1"/>
+          </a:lnRef>
+          <a:fillRef idx="3">
+            <a:schemeClr val="accent1"/>
+          </a:fillRef>
+          <a:effectRef idx="2">
+            <a:schemeClr val="accent1"/>
+          </a:effectRef>
+          <a:fontRef idx="minor">
+            <a:schemeClr val="lt1"/>
+          </a:fontRef>
+        </p:style>
+        <p:txBody>
+          <a:bodyPr rtlCol="0" anchor="ctr"/>
+          <a:lstStyle/>
+          <a:p>
+            <a:pPr algn="ctr"/>
+          </a:p>
+        </p:txBody>
+      </p:sp>
+      <p:sp>
+        <p:nvSpPr>
+          <p:cNvPr id="5" name="TextBox 4"/>
+          <p:cNvSpPr txBox="1"/>
+          <p:nvPr/>
+        </p:nvSpPr>
+        <p:spPr>
+          <a:xfrm>
+            <a:off x="274320" y="6601968"/>
+            <a:ext cx="4572000" cy="228600"/>
+          </a:xfrm>
+          <a:prstGeom prst="rect">
+            <a:avLst/>
+          </a:prstGeom>
+          <a:noFill/>
+        </p:spPr>
+        <p:txBody>
+          <a:bodyPr wrap="none">
+            <a:spAutoFit/>
+          </a:bodyPr>
+          <a:lstStyle/>
+          <a:p>
+            <a:pPr algn="l">
+              <a:defRPr sz="1000" b="0">
+                <a:solidFill>
+                  <a:srgbClr val="555555"/>
+                </a:solidFill>
+                <a:latin typeface="Arial"/>
+              </a:defRPr>
+            </a:pPr>
+            <a:r>
+              <a:t>Test: La ciudad</a:t>
+            </a:r>
+          </a:p>
+        </p:txBody>
+      </p:sp>
+      <p:sp>
+        <p:nvSpPr>
+          <p:cNvPr id="6" name="TextBox 5"/>
+          <p:cNvSpPr txBox="1"/>
+          <p:nvPr/>
+        </p:nvSpPr>
+        <p:spPr>
+          <a:xfrm>
+            <a:off x="9144000" y="6601968"/>
+            <a:ext cx="2743200" cy="228600"/>
+          </a:xfrm>
+          <a:prstGeom prst="rect">
+            <a:avLst/>
+          </a:prstGeom>
+          <a:noFill/>
+        </p:spPr>
+        <p:txBody>
+          <a:bodyPr wrap="none">
+            <a:spAutoFit/>
+          </a:bodyPr>
+          <a:lstStyle/>
+          <a:p>
+            <a:pPr algn="r">
+              <a:defRPr sz="1000" b="0">
+                <a:solidFill>
+                  <a:srgbClr val="555555"/>
+                </a:solidFill>
+                <a:latin typeface="Arial"/>
+              </a:defRPr>
+            </a:pPr>
+            <a:r>
+              <a:t>Sequenz 6</a:t>
+            </a:r>
+          </a:p>
+        </p:txBody>
+      </p:sp>
+      <p:sp>
+        <p:nvSpPr>
+          <p:cNvPr id="7" name="TextBox 6"/>
+          <p:cNvSpPr txBox="1"/>
+          <p:nvPr/>
+        </p:nvSpPr>
+        <p:spPr>
+          <a:xfrm>
+            <a:off x="457200" y="640080"/>
+            <a:ext cx="11274552" cy="731520"/>
+          </a:xfrm>
+          <a:prstGeom prst="rect">
+            <a:avLst/>
+          </a:prstGeom>
+          <a:noFill/>
+        </p:spPr>
+        <p:txBody>
+          <a:bodyPr wrap="none">
+            <a:spAutoFit/>
+          </a:bodyPr>
+          <a:lstStyle/>
+          <a:p>
+            <a:pPr algn="l">
+              <a:defRPr sz="3200" b="1">
+                <a:solidFill>
+                  <a:srgbClr val="C41E3A"/>
+                </a:solidFill>
+                <a:latin typeface="Arial"/>
+              </a:defRPr>
+            </a:pPr>
+            <a:r>
+              <a:t>Tipps für den Test</a:t>
+            </a:r>
+          </a:p>
+        </p:txBody>
+      </p:sp>
+      <p:sp>
+        <p:nvSpPr>
+          <p:cNvPr id="8" name="TextBox 7"/>
+          <p:cNvSpPr txBox="1"/>
+          <p:nvPr/>
+        </p:nvSpPr>
+        <p:spPr>
+          <a:xfrm>
+            <a:off x="640080" y="1463040"/>
+            <a:ext cx="10972800" cy="548640"/>
+          </a:xfrm>
+          <a:prstGeom prst="rect">
+            <a:avLst/>
+          </a:prstGeom>
+          <a:noFill/>
+        </p:spPr>
+        <p:txBody>
+          <a:bodyPr wrap="none">
+            <a:spAutoFit/>
+          </a:bodyPr>
+          <a:lstStyle/>
+          <a:p>
+            <a:pPr algn="l">
+              <a:defRPr sz="2000" b="0">
+                <a:solidFill>
+                  <a:srgbClr val="222222"/>
+                </a:solidFill>
+                <a:latin typeface="Arial"/>
+              </a:defRPr>
+            </a:pPr>
+            <a:r>
+              <a:t>ir a vs. estar en unterscheiden</a:t>
+            </a:r>
+          </a:p>
+        </p:txBody>
+      </p:sp>
+      <p:sp>
+        <p:nvSpPr>
+          <p:cNvPr id="9" name="TextBox 8"/>
+          <p:cNvSpPr txBox="1"/>
+          <p:nvPr/>
+        </p:nvSpPr>
+        <p:spPr>
+          <a:xfrm>
+            <a:off x="640080" y="2194560"/>
+            <a:ext cx="10972800" cy="548640"/>
+          </a:xfrm>
+          <a:prstGeom prst="rect">
+            <a:avLst/>
+          </a:prstGeom>
+          <a:noFill/>
+        </p:spPr>
+        <p:txBody>
+          <a:bodyPr wrap="none">
+            <a:spAutoFit/>
+          </a:bodyPr>
+          <a:lstStyle/>
+          <a:p>
+            <a:pPr algn="l">
+              <a:defRPr sz="2000" b="0">
+                <a:solidFill>
+                  <a:srgbClr val="222222"/>
+                </a:solidFill>
+                <a:latin typeface="Arial"/>
+              </a:defRPr>
+            </a:pPr>
+            <a:r>
+              <a:t>a + el = al nicht vergessen</a:t>
+            </a:r>
+          </a:p>
+        </p:txBody>
+      </p:sp>
+      <p:sp>
+        <p:nvSpPr>
+          <p:cNvPr id="10" name="TextBox 9"/>
+          <p:cNvSpPr txBox="1"/>
+          <p:nvPr/>
+        </p:nvSpPr>
+        <p:spPr>
+          <a:xfrm>
+            <a:off x="640080" y="2926080"/>
+            <a:ext cx="10972800" cy="548640"/>
+          </a:xfrm>
+          <a:prstGeom prst="rect">
+            <a:avLst/>
+          </a:prstGeom>
+          <a:noFill/>
+        </p:spPr>
+        <p:txBody>
+          <a:bodyPr wrap="none">
+            <a:spAutoFit/>
+          </a:bodyPr>
+          <a:lstStyle/>
+          <a:p>
+            <a:pPr algn="l">
+              <a:defRPr sz="2000" b="0">
+                <a:solidFill>
+                  <a:srgbClr val="222222"/>
+                </a:solidFill>
+                <a:latin typeface="Arial"/>
+              </a:defRPr>
+            </a:pPr>
+            <a:r>
+              <a:t>Richtungen mit Artikeln</a:t>
+            </a:r>
+          </a:p>
+        </p:txBody>
+      </p:sp>
+    </p:spTree>
+  </p:cSld>
+  <p:clrMapOvr>
+    <a:masterClrMapping/>
+  </p:clrMapOvr>
+</p:sld>
+</file>
+
+<file path=ppt/slides/slide9.xml><?xml version="1.0" encoding="utf-8"?>
+<p:sld xmlns:a="http://schemas.openxmlformats.org/drawingml/2006/main" xmlns:p="http://schemas.openxmlformats.org/presentationml/2006/main" xmlns:r="http://schemas.openxmlformats.org/officeDocument/2006/relationships">
+  <p:cSld>
+    <p:spTree>
+      <p:nvGrpSpPr>
+        <p:cNvPr id="1" name=""/>
+        <p:cNvGrpSpPr/>
+        <p:nvPr/>
+      </p:nvGrpSpPr>
+      <p:grpSpPr/>
+      <p:sp>
+        <p:nvSpPr>
+          <p:cNvPr id="2" name="Rectangle 1"/>
+          <p:cNvSpPr/>
+          <p:nvPr/>
+        </p:nvSpPr>
+        <p:spPr>
+          <a:xfrm>
+            <a:off x="0" y="0"/>
+            <a:ext cx="12191695" cy="457200"/>
+          </a:xfrm>
+          <a:prstGeom prst="rect">
+            <a:avLst/>
+          </a:prstGeom>
+          <a:solidFill>
+            <a:srgbClr val="C41E3A"/>
+          </a:solidFill>
+          <a:ln>
+            <a:noFill/>
+          </a:ln>
+        </p:spPr>
+        <p:style>
+          <a:lnRef idx="1">
+            <a:schemeClr val="accent1"/>
+          </a:lnRef>
+          <a:fillRef idx="3">
+            <a:schemeClr val="accent1"/>
+          </a:fillRef>
+          <a:effectRef idx="2">
+            <a:schemeClr val="accent1"/>
+          </a:effectRef>
+          <a:fontRef idx="minor">
+            <a:schemeClr val="lt1"/>
+          </a:fontRef>
+        </p:style>
+        <p:txBody>
+          <a:bodyPr rtlCol="0" anchor="ctr"/>
+          <a:lstStyle/>
+          <a:p>
+            <a:pPr algn="ctr"/>
+          </a:p>
+        </p:txBody>
+      </p:sp>
+      <p:sp>
+        <p:nvSpPr>
+          <p:cNvPr id="3" name="TextBox 2"/>
+          <p:cNvSpPr txBox="1"/>
+          <p:nvPr/>
+        </p:nvSpPr>
+        <p:spPr>
+          <a:xfrm>
+            <a:off x="274320" y="91440"/>
+            <a:ext cx="3657600" cy="274320"/>
+          </a:xfrm>
+          <a:prstGeom prst="rect">
+            <a:avLst/>
+          </a:prstGeom>
+          <a:noFill/>
+        </p:spPr>
+        <p:txBody>
+          <a:bodyPr wrap="none">
+            <a:spAutoFit/>
+          </a:bodyPr>
+          <a:lstStyle/>
+          <a:p>
+            <a:pPr algn="l">
+              <a:defRPr sz="1400" b="1">
+                <a:solidFill>
+                  <a:srgbClr val="FFFFFF"/>
+                </a:solidFill>
+                <a:latin typeface="Arial"/>
+              </a:defRPr>
+            </a:pPr>
+            <a:r>
+              <a:t>Spanisch Klasse 7 · LP-06d</a:t>
+            </a:r>
+          </a:p>
+        </p:txBody>
+      </p:sp>
+      <p:sp>
+        <p:nvSpPr>
+          <p:cNvPr id="4" name="Rectangle 3"/>
+          <p:cNvSpPr/>
+          <p:nvPr/>
+        </p:nvSpPr>
+        <p:spPr>
+          <a:xfrm>
+            <a:off x="0" y="6583680"/>
+            <a:ext cx="12191695" cy="274320"/>
+          </a:xfrm>
+          <a:prstGeom prst="rect">
+            <a:avLst/>
+          </a:prstGeom>
+          <a:solidFill>
+            <a:srgbClr val="F5F5F5"/>
+          </a:solidFill>
+          <a:ln>
+            <a:noFill/>
+          </a:ln>
+        </p:spPr>
+        <p:style>
+          <a:lnRef idx="1">
+            <a:schemeClr val="accent1"/>
+          </a:lnRef>
+          <a:fillRef idx="3">
+            <a:schemeClr val="accent1"/>
+          </a:fillRef>
+          <a:effectRef idx="2">
+            <a:schemeClr val="accent1"/>
+          </a:effectRef>
+          <a:fontRef idx="minor">
+            <a:schemeClr val="lt1"/>
+          </a:fontRef>
+        </p:style>
+        <p:txBody>
+          <a:bodyPr rtlCol="0" anchor="ctr"/>
+          <a:lstStyle/>
+          <a:p>
+            <a:pPr algn="ctr"/>
+          </a:p>
+        </p:txBody>
+      </p:sp>
+      <p:sp>
+        <p:nvSpPr>
+          <p:cNvPr id="5" name="TextBox 4"/>
+          <p:cNvSpPr txBox="1"/>
+          <p:nvPr/>
+        </p:nvSpPr>
+        <p:spPr>
+          <a:xfrm>
+            <a:off x="274320" y="6601968"/>
+            <a:ext cx="4572000" cy="228600"/>
+          </a:xfrm>
+          <a:prstGeom prst="rect">
+            <a:avLst/>
+          </a:prstGeom>
+          <a:noFill/>
+        </p:spPr>
+        <p:txBody>
+          <a:bodyPr wrap="none">
+            <a:spAutoFit/>
+          </a:bodyPr>
+          <a:lstStyle/>
+          <a:p>
+            <a:pPr algn="l">
+              <a:defRPr sz="1000" b="0">
+                <a:solidFill>
+                  <a:srgbClr val="555555"/>
+                </a:solidFill>
+                <a:latin typeface="Arial"/>
+              </a:defRPr>
+            </a:pPr>
+            <a:r>
+              <a:t>Test: La ciudad</a:t>
+            </a:r>
+          </a:p>
+        </p:txBody>
+      </p:sp>
+      <p:sp>
+        <p:nvSpPr>
+          <p:cNvPr id="6" name="TextBox 5"/>
+          <p:cNvSpPr txBox="1"/>
+          <p:nvPr/>
+        </p:nvSpPr>
+        <p:spPr>
+          <a:xfrm>
+            <a:off x="9144000" y="6601968"/>
+            <a:ext cx="2743200" cy="228600"/>
+          </a:xfrm>
+          <a:prstGeom prst="rect">
+            <a:avLst/>
+          </a:prstGeom>
+          <a:noFill/>
+        </p:spPr>
+        <p:txBody>
+          <a:bodyPr wrap="none">
+            <a:spAutoFit/>
+          </a:bodyPr>
+          <a:lstStyle/>
+          <a:p>
+            <a:pPr algn="r">
+              <a:defRPr sz="1000" b="0">
+                <a:solidFill>
+                  <a:srgbClr val="555555"/>
+                </a:solidFill>
+                <a:latin typeface="Arial"/>
+              </a:defRPr>
+            </a:pPr>
+            <a:r>
+              <a:t>Sequenz 6</a:t>
+            </a:r>
+          </a:p>
+        </p:txBody>
+      </p:sp>
+      <p:sp>
+        <p:nvSpPr>
+          <p:cNvPr id="7" name="Rectangle 6"/>
+          <p:cNvSpPr/>
+          <p:nvPr/>
+        </p:nvSpPr>
+        <p:spPr>
+          <a:xfrm>
+            <a:off x="457200" y="640080"/>
+            <a:ext cx="1828800" cy="457200"/>
+          </a:xfrm>
+          <a:prstGeom prst="rect">
+            <a:avLst/>
+          </a:prstGeom>
+          <a:solidFill>
+            <a:srgbClr val="C41E3A"/>
+          </a:solidFill>
+          <a:ln>
+            <a:noFill/>
+          </a:ln>
+        </p:spPr>
+        <p:style>
+          <a:lnRef idx="1">
+            <a:schemeClr val="accent1"/>
+          </a:lnRef>
+          <a:fillRef idx="3">
+            <a:schemeClr val="accent1"/>
+          </a:fillRef>
+          <a:effectRef idx="2">
+            <a:schemeClr val="accent1"/>
+          </a:effectRef>
+          <a:fontRef idx="minor">
+            <a:schemeClr val="lt1"/>
+          </a:fontRef>
+        </p:style>
+        <p:txBody>
+          <a:bodyPr rtlCol="0" anchor="ctr"/>
+          <a:lstStyle/>
+          <a:p>
+            <a:pPr algn="ctr"/>
+          </a:p>
+        </p:txBody>
+      </p:sp>
+      <p:sp>
+        <p:nvSpPr>
+          <p:cNvPr id="8" name="TextBox 7"/>
+          <p:cNvSpPr txBox="1"/>
+          <p:nvPr/>
+        </p:nvSpPr>
+        <p:spPr>
+          <a:xfrm>
+            <a:off x="548640" y="713231"/>
+            <a:ext cx="1645920" cy="320040"/>
+          </a:xfrm>
+          <a:prstGeom prst="rect">
+            <a:avLst/>
+          </a:prstGeom>
+          <a:noFill/>
+        </p:spPr>
+        <p:txBody>
+          <a:bodyPr wrap="none">
+            <a:spAutoFit/>
+          </a:bodyPr>
+          <a:lstStyle/>
+          <a:p>
+            <a:pPr algn="ctr">
+              <a:defRPr sz="1400" b="1">
+                <a:solidFill>
+                  <a:srgbClr val="FFFFFF"/>
+                </a:solidFill>
+                <a:latin typeface="Arial"/>
+              </a:defRPr>
+            </a:pPr>
+            <a:r>
+              <a:t>HAUSAUFGABE</a:t>
+            </a:r>
+          </a:p>
+        </p:txBody>
+      </p:sp>
+      <p:sp>
+        <p:nvSpPr>
+          <p:cNvPr id="9" name="TextBox 8"/>
+          <p:cNvSpPr txBox="1"/>
+          <p:nvPr/>
+        </p:nvSpPr>
+        <p:spPr>
+          <a:xfrm>
+            <a:off x="457200" y="1280160"/>
+            <a:ext cx="11274552" cy="731520"/>
+          </a:xfrm>
+          <a:prstGeom prst="rect">
+            <a:avLst/>
+          </a:prstGeom>
+          <a:noFill/>
+        </p:spPr>
+        <p:txBody>
+          <a:bodyPr wrap="none">
+            <a:spAutoFit/>
+          </a:bodyPr>
+          <a:lstStyle/>
+          <a:p>
+            <a:pPr algn="l">
+              <a:defRPr sz="3200" b="1">
+                <a:solidFill>
+                  <a:srgbClr val="C41E3A"/>
+                </a:solidFill>
+                <a:latin typeface="Arial"/>
+              </a:defRPr>
+            </a:pPr>
+            <a:r>
               <a:t>📚 Para casa</a:t>
             </a:r>
           </a:p>
@@ -4171,7 +6954,7 @@
               </a:defRPr>
             </a:pPr>
             <a:r>
-              <a:t>Ortsvokabeln</a:t>
+              <a:t>Alle Vokabeln Seq. 6 wiederholen</a:t>
             </a:r>
           </a:p>
         </p:txBody>
@@ -4243,7 +7026,7 @@
               </a:defRPr>
             </a:pPr>
             <a:r>
-              <a:t>ir/estar</a:t>
+              <a:t>ir und estar üben</a:t>
             </a:r>
           </a:p>
         </p:txBody>
@@ -4251,6 +7034,78 @@
       <p:sp>
         <p:nvSpPr>
           <p:cNvPr id="14" name="TextBox 13"/>
+          <p:cNvSpPr txBox="1"/>
+          <p:nvPr/>
+        </p:nvSpPr>
+        <p:spPr>
+          <a:xfrm>
+            <a:off x="640080" y="3749039"/>
+            <a:ext cx="457200" cy="457200"/>
+          </a:xfrm>
+          <a:prstGeom prst="rect">
+            <a:avLst/>
+          </a:prstGeom>
+          <a:noFill/>
+        </p:spPr>
+        <p:txBody>
+          <a:bodyPr wrap="none">
+            <a:spAutoFit/>
+          </a:bodyPr>
+          <a:lstStyle/>
+          <a:p>
+            <a:pPr algn="l">
+              <a:defRPr sz="2400" b="1">
+                <a:solidFill>
+                  <a:srgbClr val="2A7A4B"/>
+                </a:solidFill>
+                <a:latin typeface="Arial"/>
+              </a:defRPr>
+            </a:pPr>
+            <a:r>
+              <a:t>✓</a:t>
+            </a:r>
+          </a:p>
+        </p:txBody>
+      </p:sp>
+      <p:sp>
+        <p:nvSpPr>
+          <p:cNvPr id="15" name="TextBox 14"/>
+          <p:cNvSpPr txBox="1"/>
+          <p:nvPr/>
+        </p:nvSpPr>
+        <p:spPr>
+          <a:xfrm>
+            <a:off x="1188720" y="3749039"/>
+            <a:ext cx="10058400" cy="457200"/>
+          </a:xfrm>
+          <a:prstGeom prst="rect">
+            <a:avLst/>
+          </a:prstGeom>
+          <a:noFill/>
+        </p:spPr>
+        <p:txBody>
+          <a:bodyPr wrap="none">
+            <a:spAutoFit/>
+          </a:bodyPr>
+          <a:lstStyle/>
+          <a:p>
+            <a:pPr algn="l">
+              <a:defRPr sz="2000" b="0">
+                <a:solidFill>
+                  <a:srgbClr val="222222"/>
+                </a:solidFill>
+                <a:latin typeface="Arial"/>
+              </a:defRPr>
+            </a:pPr>
+            <a:r>
+              <a:t>Wegbeschreibung üben</a:t>
+            </a:r>
+          </a:p>
+        </p:txBody>
+      </p:sp>
+      <p:sp>
+        <p:nvSpPr>
+          <p:cNvPr id="16" name="TextBox 15"/>
           <p:cNvSpPr txBox="1"/>
           <p:nvPr/>
         </p:nvSpPr>
